--- a/presentation/ProjectB_SectionA.pptx
+++ b/presentation/ProjectB_SectionA.pptx
@@ -152,7 +152,7 @@
               <a:lstStyle/>
               <a:p>
                 <a:pPr>
-                  <a:defRPr b="1" i="0" strike="noStrike" sz="1100" u="none">
+                  <a:defRPr b="1" i="0" strike="noStrike" sz="1400" u="none">
                     <a:solidFill>
                       <a:srgbClr val="1B2436"/>
                     </a:solidFill>
@@ -247,7 +247,7 @@
             <a:lstStyle/>
             <a:p>
               <a:pPr>
-                <a:defRPr b="1" i="0" strike="noStrike" sz="1100" u="none">
+                <a:defRPr b="1" i="0" strike="noStrike" sz="1400" u="none">
                   <a:solidFill>
                     <a:srgbClr val="1B2436"/>
                   </a:solidFill>
@@ -295,7 +295,7 @@
           <a:lstStyle/>
           <a:p>
             <a:pPr>
-              <a:defRPr sz="1100" b="0" i="0" u="none" strike="noStrike">
+              <a:defRPr sz="1300" b="0" i="0" u="none" strike="noStrike">
                 <a:solidFill>
                   <a:srgbClr val="4A5568"/>
                 </a:solidFill>
@@ -348,7 +348,7 @@
           <a:lstStyle/>
           <a:p>
             <a:pPr>
-              <a:defRPr sz="1000" b="0" i="0" u="none" strike="noStrike">
+              <a:defRPr sz="1200" b="0" i="0" u="none" strike="noStrike">
                 <a:solidFill>
                   <a:srgbClr val="7C8797"/>
                 </a:solidFill>
@@ -427,7 +427,7 @@
               <a:lstStyle/>
               <a:p>
                 <a:pPr>
-                  <a:defRPr b="1" i="0" strike="noStrike" sz="1100" u="none">
+                  <a:defRPr b="1" i="0" strike="noStrike" sz="1400" u="none">
                     <a:solidFill>
                       <a:srgbClr val="1B2436"/>
                     </a:solidFill>
@@ -522,7 +522,7 @@
             <a:lstStyle/>
             <a:p>
               <a:pPr>
-                <a:defRPr b="1" i="0" strike="noStrike" sz="1100" u="none">
+                <a:defRPr b="1" i="0" strike="noStrike" sz="1400" u="none">
                   <a:solidFill>
                     <a:srgbClr val="1B2436"/>
                   </a:solidFill>
@@ -570,7 +570,7 @@
           <a:lstStyle/>
           <a:p>
             <a:pPr>
-              <a:defRPr sz="1100" b="0" i="0" u="none" strike="noStrike">
+              <a:defRPr sz="1300" b="0" i="0" u="none" strike="noStrike">
                 <a:solidFill>
                   <a:srgbClr val="4A5568"/>
                 </a:solidFill>
@@ -624,7 +624,7 @@
           <a:lstStyle/>
           <a:p>
             <a:pPr>
-              <a:defRPr sz="1000" b="0" i="0" u="none" strike="noStrike">
+              <a:defRPr sz="1200" b="0" i="0" u="none" strike="noStrike">
                 <a:solidFill>
                   <a:srgbClr val="7C8797"/>
                 </a:solidFill>
@@ -708,7 +708,7 @@
               <a:lstStyle/>
               <a:p>
                 <a:pPr>
-                  <a:defRPr b="1" i="0" strike="noStrike" sz="1100" u="none">
+                  <a:defRPr b="1" i="0" strike="noStrike" sz="1400" u="none">
                     <a:solidFill>
                       <a:srgbClr val="1B2436"/>
                     </a:solidFill>
@@ -728,7 +728,7 @@
           </c:dLbls>
           <c:marker>
             <c:symbol val="circle"/>
-            <c:size val="9"/>
+            <c:size val="10"/>
             <c:spPr>
               <a:solidFill>
                 <a:srgbClr val="B45309"/>
@@ -801,7 +801,7 @@
             <a:lstStyle/>
             <a:p>
               <a:pPr>
-                <a:defRPr b="1" i="0" strike="noStrike" sz="1100" u="none">
+                <a:defRPr b="1" i="0" strike="noStrike" sz="1400" u="none">
                   <a:solidFill>
                     <a:srgbClr val="1B2436"/>
                   </a:solidFill>
@@ -861,7 +861,7 @@
               <a:lstStyle/>
               <a:p>
                 <a:pPr>
-                  <a:defRPr b="1" i="0" strike="noStrike" sz="1100" u="none">
+                  <a:defRPr b="1" i="0" strike="noStrike" sz="1400" u="none">
                     <a:solidFill>
                       <a:srgbClr val="1B2436"/>
                     </a:solidFill>
@@ -953,7 +953,7 @@
             <a:lstStyle/>
             <a:p>
               <a:pPr>
-                <a:defRPr b="1" i="0" strike="noStrike" sz="1100" u="none">
+                <a:defRPr b="1" i="0" strike="noStrike" sz="1400" u="none">
                   <a:solidFill>
                     <a:srgbClr val="1B2436"/>
                   </a:solidFill>
@@ -1000,7 +1000,7 @@
           <a:lstStyle/>
           <a:p>
             <a:pPr>
-              <a:defRPr sz="1100" b="0" i="0" u="none" strike="noStrike">
+              <a:defRPr sz="1300" b="0" i="0" u="none" strike="noStrike">
                 <a:solidFill>
                   <a:srgbClr val="4A5568"/>
                 </a:solidFill>
@@ -1054,7 +1054,7 @@
           <a:lstStyle/>
           <a:p>
             <a:pPr>
-              <a:defRPr sz="1000" b="0" i="0" u="none" strike="noStrike">
+              <a:defRPr sz="1200" b="0" i="0" u="none" strike="noStrike">
                 <a:solidFill>
                   <a:srgbClr val="7C8797"/>
                 </a:solidFill>
@@ -1085,7 +1085,7 @@
         <a:lstStyle/>
         <a:p>
           <a:pPr>
-            <a:defRPr sz="1050">
+            <a:defRPr sz="1300">
               <a:solidFill>
                 <a:srgbClr val="4A5568"/>
               </a:solidFill>
@@ -1158,7 +1158,7 @@
               <a:lstStyle/>
               <a:p>
                 <a:pPr>
-                  <a:defRPr b="1" i="0" strike="noStrike" sz="1100" u="none">
+                  <a:defRPr b="1" i="0" strike="noStrike" sz="1400" u="none">
                     <a:solidFill>
                       <a:srgbClr val="1B2436"/>
                     </a:solidFill>
@@ -1178,7 +1178,7 @@
           </c:dLbls>
           <c:marker>
             <c:symbol val="circle"/>
-            <c:size val="9"/>
+            <c:size val="10"/>
             <c:spPr>
               <a:solidFill>
                 <a:srgbClr val="B45309"/>
@@ -1275,7 +1275,7 @@
             <a:lstStyle/>
             <a:p>
               <a:pPr>
-                <a:defRPr b="1" i="0" strike="noStrike" sz="1100" u="none">
+                <a:defRPr b="1" i="0" strike="noStrike" sz="1400" u="none">
                   <a:solidFill>
                     <a:srgbClr val="1B2436"/>
                   </a:solidFill>
@@ -1305,35 +1305,6 @@
         </c:scaling>
         <c:delete val="0"/>
         <c:axPos val="b"/>
-        <c:title>
-          <c:tx>
-            <c:rich>
-              <a:bodyPr/>
-              <a:lstStyle/>
-              <a:p>
-                <a:pPr>
-                  <a:defRPr sz="1050" b="0" i="0" u="none" strike="noStrike">
-                    <a:solidFill>
-                      <a:srgbClr val="7C8797"/>
-                    </a:solidFill>
-                    <a:latin typeface="Calibri"/>
-                  </a:defRPr>
-                </a:pPr>
-                <a:r>
-                  <a:rPr sz="1050" b="0" i="0" u="none" strike="noStrike">
-                    <a:solidFill>
-                      <a:srgbClr val="7C8797"/>
-                    </a:solidFill>
-                    <a:latin typeface="Calibri"/>
-                  </a:rPr>
-                  <a:t>Copies of each known positive in the final training set</a:t>
-                </a:r>
-              </a:p>
-            </c:rich>
-          </c:tx>
-          <c:layout/>
-          <c:overlay val="0"/>
-        </c:title>
         <c:numFmt formatCode="General" sourceLinked="1"/>
         <c:majorTickMark val="out"/>
         <c:minorTickMark val="none"/>
@@ -1352,7 +1323,7 @@
           <a:lstStyle/>
           <a:p>
             <a:pPr>
-              <a:defRPr sz="1100" b="0" i="0" u="none" strike="noStrike">
+              <a:defRPr sz="1300" b="0" i="0" u="none" strike="noStrike">
                 <a:solidFill>
                   <a:srgbClr val="4A5568"/>
                 </a:solidFill>
@@ -1388,35 +1359,6 @@
             </a:ln>
           </c:spPr>
         </c:majorGridlines>
-        <c:title>
-          <c:tx>
-            <c:rich>
-              <a:bodyPr/>
-              <a:lstStyle/>
-              <a:p>
-                <a:pPr>
-                  <a:defRPr sz="1050" b="0" i="0" u="none" strike="noStrike">
-                    <a:solidFill>
-                      <a:srgbClr val="7C8797"/>
-                    </a:solidFill>
-                    <a:latin typeface="Calibri"/>
-                  </a:defRPr>
-                </a:pPr>
-                <a:r>
-                  <a:rPr sz="1050" b="0" i="0" u="none" strike="noStrike">
-                    <a:solidFill>
-                      <a:srgbClr val="7C8797"/>
-                    </a:solidFill>
-                    <a:latin typeface="Calibri"/>
-                  </a:rPr>
-                  <a:t>Mean F1 (“Left”)</a:t>
-                </a:r>
-              </a:p>
-            </c:rich>
-          </c:tx>
-          <c:layout/>
-          <c:overlay val="0"/>
-        </c:title>
         <c:numFmt formatCode="0.000" sourceLinked="0"/>
         <c:majorTickMark val="out"/>
         <c:minorTickMark val="none"/>
@@ -1435,7 +1377,7 @@
           <a:lstStyle/>
           <a:p>
             <a:pPr>
-              <a:defRPr sz="1000" b="0" i="0" u="none" strike="noStrike">
+              <a:defRPr sz="1200" b="0" i="0" u="none" strike="noStrike">
                 <a:solidFill>
                   <a:srgbClr val="7C8797"/>
                 </a:solidFill>
@@ -1514,7 +1456,7 @@
               <a:lstStyle/>
               <a:p>
                 <a:pPr>
-                  <a:defRPr b="1" i="0" strike="noStrike" sz="1100" u="none">
+                  <a:defRPr b="1" i="0" strike="noStrike" sz="1400" u="none">
                     <a:solidFill>
                       <a:srgbClr val="1B2436"/>
                     </a:solidFill>
@@ -1637,13 +1579,13 @@
                 <c:ptCount val="9"/>
                 <c:lvl>
                   <c:pt idx="0">
-                    <c:v>Tiered hard-positive oversampling</c:v>
+                    <c:v>Tiered oversampling</c:v>
                   </c:pt>
                   <c:pt idx="1">
-                    <c:v>Graded batch schedule</c:v>
+                    <c:v>Graded batches</c:v>
                   </c:pt>
                   <c:pt idx="2">
-                    <c:v>Hard-negative upweighting</c:v>
+                    <c:v>Hard-negative upweight</c:v>
                   </c:pt>
                   <c:pt idx="3">
                     <c:v>10 x 500 rounds</c:v>
@@ -1655,7 +1597,7 @@
                     <c:v>KMeans diversity</c:v>
                   </c:pt>
                   <c:pt idx="6">
-                    <c:v>Cluster exploration (5%)</c:v>
+                    <c:v>Cluster exploration</c:v>
                   </c:pt>
                   <c:pt idx="7">
                     <c:v>Uncertainty sampling</c:v>
@@ -1711,7 +1653,7 @@
             <a:lstStyle/>
             <a:p>
               <a:pPr>
-                <a:defRPr b="1" i="0" strike="noStrike" sz="1100" u="none">
+                <a:defRPr b="1" i="0" strike="noStrike" sz="1400" u="none">
                   <a:solidFill>
                     <a:srgbClr val="1B2436"/>
                   </a:solidFill>
@@ -1759,7 +1701,7 @@
           <a:lstStyle/>
           <a:p>
             <a:pPr>
-              <a:defRPr sz="1100" b="0" i="0" u="none" strike="noStrike">
+              <a:defRPr sz="1300" b="0" i="0" u="none" strike="noStrike">
                 <a:solidFill>
                   <a:srgbClr val="4A5568"/>
                 </a:solidFill>
@@ -1813,7 +1755,7 @@
           <a:lstStyle/>
           <a:p>
             <a:pPr>
-              <a:defRPr sz="1000" b="0" i="0" u="none" strike="noStrike">
+              <a:defRPr sz="1200" b="0" i="0" u="none" strike="noStrike">
                 <a:solidFill>
                   <a:srgbClr val="7C8797"/>
                 </a:solidFill>
@@ -3068,8 +3010,8 @@
         </p:nvSpPr>
         <p:spPr>
           <a:xfrm>
-            <a:off x="10287000" y="457200"/>
-            <a:ext cx="868680" cy="274320"/>
+            <a:off x="10204704" y="457200"/>
+            <a:ext cx="950976" cy="310896"/>
           </a:xfrm>
           <a:prstGeom prst="roundRect">
             <a:avLst>
@@ -3090,8 +3032,8 @@
         </p:nvSpPr>
         <p:spPr>
           <a:xfrm>
-            <a:off x="10287000" y="457200"/>
-            <a:ext cx="868680" cy="274320"/>
+            <a:off x="10204704" y="457200"/>
+            <a:ext cx="950976" cy="310896"/>
           </a:xfrm>
           <a:prstGeom prst="rect">
             <a:avLst/>
@@ -3107,7 +3049,7 @@
               <a:buNone/>
             </a:pPr>
             <a:r>
-              <a:rPr lang="en-US" sz="1000" b="1" spc="100" kern="0" dirty="0">
+              <a:rPr lang="en-US" sz="1200" b="1" spc="100" kern="0" dirty="0">
                 <a:solidFill>
                   <a:srgbClr val="14213D"/>
                 </a:solidFill>
@@ -3117,7 +3059,7 @@
               </a:rPr>
               <a:t>RAZ</a:t>
             </a:r>
-            <a:endParaRPr lang="en-US" sz="1000" dirty="0"/>
+            <a:endParaRPr lang="en-US" sz="1200" dirty="0"/>
           </a:p>
         </p:txBody>
       </p:sp>
@@ -3129,8 +3071,8 @@
         </p:nvSpPr>
         <p:spPr>
           <a:xfrm>
-            <a:off x="11265408" y="457200"/>
-            <a:ext cx="466344" cy="274320"/>
+            <a:off x="11228832" y="457200"/>
+            <a:ext cx="502920" cy="310896"/>
           </a:xfrm>
           <a:prstGeom prst="rect">
             <a:avLst/>
@@ -3146,7 +3088,7 @@
               <a:buNone/>
             </a:pPr>
             <a:r>
-              <a:rPr lang="en-US" sz="1000" dirty="0">
+              <a:rPr lang="en-US" sz="1200" dirty="0">
                 <a:solidFill>
                   <a:srgbClr val="8E9CB8"/>
                 </a:solidFill>
@@ -3156,7 +3098,7 @@
               </a:rPr>
               <a:t>1 / 6</a:t>
             </a:r>
-            <a:endParaRPr lang="en-US" sz="1000" dirty="0"/>
+            <a:endParaRPr lang="en-US" sz="1200" dirty="0"/>
           </a:p>
         </p:txBody>
       </p:sp>
@@ -3169,7 +3111,7 @@
         <p:spPr>
           <a:xfrm>
             <a:off x="658368" y="457200"/>
-            <a:ext cx="5486400" cy="256032"/>
+            <a:ext cx="5486400" cy="292608"/>
           </a:xfrm>
           <a:prstGeom prst="rect">
             <a:avLst/>
@@ -3185,7 +3127,7 @@
               <a:buNone/>
             </a:pPr>
             <a:r>
-              <a:rPr lang="en-US" sz="1150" b="1" spc="160" kern="0" dirty="0">
+              <a:rPr lang="en-US" sz="1400" b="1" spc="160" kern="0" dirty="0">
                 <a:solidFill>
                   <a:srgbClr val="E3A140"/>
                 </a:solidFill>
@@ -3195,7 +3137,7 @@
               </a:rPr>
               <a:t>Project B  ·  Section A</a:t>
             </a:r>
-            <a:endParaRPr lang="en-US" sz="1150" dirty="0"/>
+            <a:endParaRPr lang="en-US" sz="1400" dirty="0"/>
           </a:p>
         </p:txBody>
       </p:sp>
@@ -3207,8 +3149,8 @@
         </p:nvSpPr>
         <p:spPr>
           <a:xfrm>
-            <a:off x="658368" y="914400"/>
-            <a:ext cx="5669280" cy="1371600"/>
+            <a:off x="658368" y="1051560"/>
+            <a:ext cx="5760720" cy="1417320"/>
           </a:xfrm>
           <a:prstGeom prst="rect">
             <a:avLst/>
@@ -3222,12 +3164,12 @@
           <a:p>
             <a:pPr indent="0" marL="0">
               <a:lnSpc>
-                <a:spcPct val="106000"/>
+                <a:spcPct val="110000"/>
               </a:lnSpc>
               <a:buNone/>
             </a:pPr>
             <a:r>
-              <a:rPr lang="en-US" sz="3400" b="1" dirty="0">
+              <a:rPr lang="en-US" sz="3600" b="1" dirty="0">
                 <a:solidFill>
                   <a:srgbClr val="FFFFFF"/>
                 </a:solidFill>
@@ -3237,17 +3179,17 @@
               </a:rPr>
               <a:t>Buy 5,000 labels.</a:t>
             </a:r>
-            <a:endParaRPr lang="en-US" sz="3400" dirty="0"/>
+            <a:endParaRPr lang="en-US" sz="3600" dirty="0"/>
           </a:p>
           <a:p>
             <a:pPr indent="0" marL="0">
               <a:lnSpc>
-                <a:spcPct val="106000"/>
+                <a:spcPct val="110000"/>
               </a:lnSpc>
               <a:buNone/>
             </a:pPr>
             <a:r>
-              <a:rPr lang="en-US" sz="3400" b="1" dirty="0">
+              <a:rPr lang="en-US" sz="3600" b="1" dirty="0">
                 <a:solidFill>
                   <a:srgbClr val="FFFFFF"/>
                 </a:solidFill>
@@ -3257,7 +3199,7 @@
               </a:rPr>
               <a:t>Maximise F1 on “Left”.</a:t>
             </a:r>
-            <a:endParaRPr lang="en-US" sz="3400" dirty="0"/>
+            <a:endParaRPr lang="en-US" sz="3600" dirty="0"/>
           </a:p>
         </p:txBody>
       </p:sp>
@@ -3269,50 +3211,8 @@
         </p:nvSpPr>
         <p:spPr>
           <a:xfrm>
-            <a:off x="658368" y="2340864"/>
-            <a:ext cx="5394960" cy="640080"/>
-          </a:xfrm>
-          <a:prstGeom prst="rect">
-            <a:avLst/>
-          </a:prstGeom>
-          <a:noFill/>
-          <a:ln/>
-        </p:spPr>
-        <p:txBody>
-          <a:bodyPr wrap="square" lIns="0" tIns="0" rIns="0" bIns="0" rtlCol="0" anchor="ctr"/>
-          <a:lstStyle/>
-          <a:p>
-            <a:pPr indent="0" marL="0">
-              <a:lnSpc>
-                <a:spcPct val="120000"/>
-              </a:lnSpc>
-              <a:buNone/>
-            </a:pPr>
-            <a:r>
-              <a:rPr lang="en-US" sz="1350" dirty="0">
-                <a:solidFill>
-                  <a:srgbClr val="C3CEE4"/>
-                </a:solidFill>
-                <a:latin typeface="Calibri" pitchFamily="34" charset="0"/>
-                <a:ea typeface="Calibri" pitchFamily="34" charset="-122"/>
-                <a:cs typeface="Calibri" pitchFamily="34" charset="-120"/>
-              </a:rPr>
-              <a:t>An oracle sells labels one employee at a time. The classifier is fixed. The only real decision is which employees to pay for.</a:t>
-            </a:r>
-            <a:endParaRPr lang="en-US" sz="1350" dirty="0"/>
-          </a:p>
-        </p:txBody>
-      </p:sp>
-      <p:sp>
-        <p:nvSpPr>
-          <p:cNvPr id="8" name="Text 6"/>
-          <p:cNvSpPr/>
-          <p:nvPr/>
-        </p:nvSpPr>
-        <p:spPr>
-          <a:xfrm>
-            <a:off x="658368" y="3163824"/>
-            <a:ext cx="2651760" cy="365760"/>
+            <a:off x="658368" y="2962656"/>
+            <a:ext cx="2468880" cy="420624"/>
           </a:xfrm>
           <a:prstGeom prst="rect">
             <a:avLst/>
@@ -3328,7 +3228,7 @@
               <a:buNone/>
             </a:pPr>
             <a:r>
-              <a:rPr lang="en-US" sz="1250" dirty="0">
+              <a:rPr lang="en-US" sz="1800" dirty="0">
                 <a:solidFill>
                   <a:srgbClr val="8E9CB8"/>
                 </a:solidFill>
@@ -3338,20 +3238,20 @@
               </a:rPr>
               <a:t>Unlabeled pool</a:t>
             </a:r>
-            <a:endParaRPr lang="en-US" sz="1250" dirty="0"/>
-          </a:p>
-        </p:txBody>
-      </p:sp>
-      <p:sp>
-        <p:nvSpPr>
-          <p:cNvPr id="9" name="Text 7"/>
-          <p:cNvSpPr/>
-          <p:nvPr/>
-        </p:nvSpPr>
-        <p:spPr>
-          <a:xfrm>
-            <a:off x="3346704" y="3163824"/>
-            <a:ext cx="2706624" cy="365760"/>
+            <a:endParaRPr lang="en-US" sz="1800" dirty="0"/>
+          </a:p>
+        </p:txBody>
+      </p:sp>
+      <p:sp>
+        <p:nvSpPr>
+          <p:cNvPr id="8" name="Text 6"/>
+          <p:cNvSpPr/>
+          <p:nvPr/>
+        </p:nvSpPr>
+        <p:spPr>
+          <a:xfrm>
+            <a:off x="3163824" y="2962656"/>
+            <a:ext cx="2889504" cy="420624"/>
           </a:xfrm>
           <a:prstGeom prst="rect">
             <a:avLst/>
@@ -3367,7 +3267,7 @@
               <a:buNone/>
             </a:pPr>
             <a:r>
-              <a:rPr lang="en-US" sz="1250" b="1" dirty="0">
+              <a:rPr lang="en-US" sz="1800" b="1" dirty="0">
                 <a:solidFill>
                   <a:srgbClr val="FFFFFF"/>
                 </a:solidFill>
@@ -3377,19 +3277,19 @@
               </a:rPr>
               <a:t>14,900</a:t>
             </a:r>
-            <a:endParaRPr lang="en-US" sz="1250" dirty="0"/>
-          </a:p>
-        </p:txBody>
-      </p:sp>
-      <p:sp>
-        <p:nvSpPr>
-          <p:cNvPr id="10" name="Shape 8"/>
-          <p:cNvSpPr/>
-          <p:nvPr/>
-        </p:nvSpPr>
-        <p:spPr>
-          <a:xfrm>
-            <a:off x="658368" y="3566160"/>
+            <a:endParaRPr lang="en-US" sz="1800" dirty="0"/>
+          </a:p>
+        </p:txBody>
+      </p:sp>
+      <p:sp>
+        <p:nvSpPr>
+          <p:cNvPr id="9" name="Shape 7"/>
+          <p:cNvSpPr/>
+          <p:nvPr/>
+        </p:nvSpPr>
+        <p:spPr>
+          <a:xfrm>
+            <a:off x="658368" y="3438144"/>
             <a:ext cx="5394960" cy="0"/>
           </a:xfrm>
           <a:prstGeom prst="line">
@@ -3406,14 +3306,14 @@
       </p:sp>
       <p:sp>
         <p:nvSpPr>
-          <p:cNvPr id="11" name="Text 9"/>
-          <p:cNvSpPr/>
-          <p:nvPr/>
-        </p:nvSpPr>
-        <p:spPr>
-          <a:xfrm>
-            <a:off x="658368" y="3621024"/>
-            <a:ext cx="2651760" cy="365760"/>
+          <p:cNvPr id="10" name="Text 8"/>
+          <p:cNvSpPr/>
+          <p:nvPr/>
+        </p:nvSpPr>
+        <p:spPr>
+          <a:xfrm>
+            <a:off x="658368" y="3511296"/>
+            <a:ext cx="2468880" cy="420624"/>
           </a:xfrm>
           <a:prstGeom prst="rect">
             <a:avLst/>
@@ -3429,7 +3329,7 @@
               <a:buNone/>
             </a:pPr>
             <a:r>
-              <a:rPr lang="en-US" sz="1250" dirty="0">
+              <a:rPr lang="en-US" sz="1800" dirty="0">
                 <a:solidFill>
                   <a:srgbClr val="8E9CB8"/>
                 </a:solidFill>
@@ -3437,22 +3337,22 @@
                 <a:ea typeface="Calibri" pitchFamily="34" charset="-122"/>
                 <a:cs typeface="Calibri" pitchFamily="34" charset="-120"/>
               </a:rPr>
-              <a:t>Free initial labels</a:t>
-            </a:r>
-            <a:endParaRPr lang="en-US" sz="1250" dirty="0"/>
-          </a:p>
-        </p:txBody>
-      </p:sp>
-      <p:sp>
-        <p:nvSpPr>
-          <p:cNvPr id="12" name="Text 10"/>
-          <p:cNvSpPr/>
-          <p:nvPr/>
-        </p:nvSpPr>
-        <p:spPr>
-          <a:xfrm>
-            <a:off x="3346704" y="3621024"/>
-            <a:ext cx="2706624" cy="365760"/>
+              <a:t>Free labels</a:t>
+            </a:r>
+            <a:endParaRPr lang="en-US" sz="1800" dirty="0"/>
+          </a:p>
+        </p:txBody>
+      </p:sp>
+      <p:sp>
+        <p:nvSpPr>
+          <p:cNvPr id="11" name="Text 9"/>
+          <p:cNvSpPr/>
+          <p:nvPr/>
+        </p:nvSpPr>
+        <p:spPr>
+          <a:xfrm>
+            <a:off x="3163824" y="3511296"/>
+            <a:ext cx="2889504" cy="420624"/>
           </a:xfrm>
           <a:prstGeom prst="rect">
             <a:avLst/>
@@ -3468,7 +3368,7 @@
               <a:buNone/>
             </a:pPr>
             <a:r>
-              <a:rPr lang="en-US" sz="1250" b="1" dirty="0">
+              <a:rPr lang="en-US" sz="1800" b="1" dirty="0">
                 <a:solidFill>
                   <a:srgbClr val="FFFFFF"/>
                 </a:solidFill>
@@ -3478,19 +3378,19 @@
               </a:rPr>
               <a:t>500</a:t>
             </a:r>
-            <a:endParaRPr lang="en-US" sz="1250" dirty="0"/>
-          </a:p>
-        </p:txBody>
-      </p:sp>
-      <p:sp>
-        <p:nvSpPr>
-          <p:cNvPr id="13" name="Shape 11"/>
-          <p:cNvSpPr/>
-          <p:nvPr/>
-        </p:nvSpPr>
-        <p:spPr>
-          <a:xfrm>
-            <a:off x="658368" y="4023360"/>
+            <a:endParaRPr lang="en-US" sz="1800" dirty="0"/>
+          </a:p>
+        </p:txBody>
+      </p:sp>
+      <p:sp>
+        <p:nvSpPr>
+          <p:cNvPr id="12" name="Shape 10"/>
+          <p:cNvSpPr/>
+          <p:nvPr/>
+        </p:nvSpPr>
+        <p:spPr>
+          <a:xfrm>
+            <a:off x="658368" y="3986784"/>
             <a:ext cx="5394960" cy="0"/>
           </a:xfrm>
           <a:prstGeom prst="line">
@@ -3507,14 +3407,14 @@
       </p:sp>
       <p:sp>
         <p:nvSpPr>
-          <p:cNvPr id="14" name="Text 12"/>
-          <p:cNvSpPr/>
-          <p:nvPr/>
-        </p:nvSpPr>
-        <p:spPr>
-          <a:xfrm>
-            <a:off x="658368" y="4078224"/>
-            <a:ext cx="2651760" cy="365760"/>
+          <p:cNvPr id="13" name="Text 11"/>
+          <p:cNvSpPr/>
+          <p:nvPr/>
+        </p:nvSpPr>
+        <p:spPr>
+          <a:xfrm>
+            <a:off x="658368" y="4059936"/>
+            <a:ext cx="2468880" cy="420624"/>
           </a:xfrm>
           <a:prstGeom prst="rect">
             <a:avLst/>
@@ -3530,7 +3430,7 @@
               <a:buNone/>
             </a:pPr>
             <a:r>
-              <a:rPr lang="en-US" sz="1250" dirty="0">
+              <a:rPr lang="en-US" sz="1800" dirty="0">
                 <a:solidFill>
                   <a:srgbClr val="8E9CB8"/>
                 </a:solidFill>
@@ -3540,20 +3440,20 @@
               </a:rPr>
               <a:t>Oracle budget</a:t>
             </a:r>
-            <a:endParaRPr lang="en-US" sz="1250" dirty="0"/>
-          </a:p>
-        </p:txBody>
-      </p:sp>
-      <p:sp>
-        <p:nvSpPr>
-          <p:cNvPr id="15" name="Text 13"/>
-          <p:cNvSpPr/>
-          <p:nvPr/>
-        </p:nvSpPr>
-        <p:spPr>
-          <a:xfrm>
-            <a:off x="3346704" y="4078224"/>
-            <a:ext cx="2706624" cy="365760"/>
+            <a:endParaRPr lang="en-US" sz="1800" dirty="0"/>
+          </a:p>
+        </p:txBody>
+      </p:sp>
+      <p:sp>
+        <p:nvSpPr>
+          <p:cNvPr id="14" name="Text 12"/>
+          <p:cNvSpPr/>
+          <p:nvPr/>
+        </p:nvSpPr>
+        <p:spPr>
+          <a:xfrm>
+            <a:off x="3163824" y="4059936"/>
+            <a:ext cx="2889504" cy="420624"/>
           </a:xfrm>
           <a:prstGeom prst="rect">
             <a:avLst/>
@@ -3569,7 +3469,7 @@
               <a:buNone/>
             </a:pPr>
             <a:r>
-              <a:rPr lang="en-US" sz="1250" b="1" dirty="0">
+              <a:rPr lang="en-US" sz="1800" b="1" dirty="0">
                 <a:solidFill>
                   <a:srgbClr val="FFFFFF"/>
                 </a:solidFill>
@@ -3577,21 +3477,21 @@
                 <a:ea typeface="Calibri" pitchFamily="34" charset="-122"/>
                 <a:cs typeface="Calibri" pitchFamily="34" charset="-120"/>
               </a:rPr>
-              <a:t>5,000 unique IDs</a:t>
-            </a:r>
-            <a:endParaRPr lang="en-US" sz="1250" dirty="0"/>
-          </a:p>
-        </p:txBody>
-      </p:sp>
-      <p:sp>
-        <p:nvSpPr>
-          <p:cNvPr id="16" name="Shape 14"/>
-          <p:cNvSpPr/>
-          <p:nvPr/>
-        </p:nvSpPr>
-        <p:spPr>
-          <a:xfrm>
-            <a:off x="658368" y="4480560"/>
+              <a:t>5,000</a:t>
+            </a:r>
+            <a:endParaRPr lang="en-US" sz="1800" dirty="0"/>
+          </a:p>
+        </p:txBody>
+      </p:sp>
+      <p:sp>
+        <p:nvSpPr>
+          <p:cNvPr id="15" name="Shape 13"/>
+          <p:cNvSpPr/>
+          <p:nvPr/>
+        </p:nvSpPr>
+        <p:spPr>
+          <a:xfrm>
+            <a:off x="658368" y="4535424"/>
             <a:ext cx="5394960" cy="0"/>
           </a:xfrm>
           <a:prstGeom prst="line">
@@ -3608,14 +3508,14 @@
       </p:sp>
       <p:sp>
         <p:nvSpPr>
-          <p:cNvPr id="17" name="Text 15"/>
-          <p:cNvSpPr/>
-          <p:nvPr/>
-        </p:nvSpPr>
-        <p:spPr>
-          <a:xfrm>
-            <a:off x="658368" y="4535424"/>
-            <a:ext cx="2651760" cy="365760"/>
+          <p:cNvPr id="16" name="Text 14"/>
+          <p:cNvSpPr/>
+          <p:nvPr/>
+        </p:nvSpPr>
+        <p:spPr>
+          <a:xfrm>
+            <a:off x="658368" y="4608576"/>
+            <a:ext cx="2468880" cy="420624"/>
           </a:xfrm>
           <a:prstGeom prst="rect">
             <a:avLst/>
@@ -3631,7 +3531,7 @@
               <a:buNone/>
             </a:pPr>
             <a:r>
-              <a:rPr lang="en-US" sz="1250" dirty="0">
+              <a:rPr lang="en-US" sz="1800" dirty="0">
                 <a:solidFill>
                   <a:srgbClr val="8E9CB8"/>
                 </a:solidFill>
@@ -3641,20 +3541,20 @@
               </a:rPr>
               <a:t>Classifier</a:t>
             </a:r>
-            <a:endParaRPr lang="en-US" sz="1250" dirty="0"/>
-          </a:p>
-        </p:txBody>
-      </p:sp>
-      <p:sp>
-        <p:nvSpPr>
-          <p:cNvPr id="18" name="Text 16"/>
-          <p:cNvSpPr/>
-          <p:nvPr/>
-        </p:nvSpPr>
-        <p:spPr>
-          <a:xfrm>
-            <a:off x="3346704" y="4535424"/>
-            <a:ext cx="2706624" cy="365760"/>
+            <a:endParaRPr lang="en-US" sz="1800" dirty="0"/>
+          </a:p>
+        </p:txBody>
+      </p:sp>
+      <p:sp>
+        <p:nvSpPr>
+          <p:cNvPr id="17" name="Text 15"/>
+          <p:cNvSpPr/>
+          <p:nvPr/>
+        </p:nvSpPr>
+        <p:spPr>
+          <a:xfrm>
+            <a:off x="3163824" y="4608576"/>
+            <a:ext cx="2889504" cy="420624"/>
           </a:xfrm>
           <a:prstGeom prst="rect">
             <a:avLst/>
@@ -3670,7 +3570,7 @@
               <a:buNone/>
             </a:pPr>
             <a:r>
-              <a:rPr lang="en-US" sz="1250" b="1" dirty="0">
+              <a:rPr lang="en-US" sz="1800" b="1" dirty="0">
                 <a:solidFill>
                   <a:srgbClr val="FFFFFF"/>
                 </a:solidFill>
@@ -3680,19 +3580,19 @@
               </a:rPr>
               <a:t>RandomForest — fixed</a:t>
             </a:r>
-            <a:endParaRPr lang="en-US" sz="1250" dirty="0"/>
-          </a:p>
-        </p:txBody>
-      </p:sp>
-      <p:sp>
-        <p:nvSpPr>
-          <p:cNvPr id="19" name="Shape 17"/>
-          <p:cNvSpPr/>
-          <p:nvPr/>
-        </p:nvSpPr>
-        <p:spPr>
-          <a:xfrm>
-            <a:off x="658368" y="4937760"/>
+            <a:endParaRPr lang="en-US" sz="1800" dirty="0"/>
+          </a:p>
+        </p:txBody>
+      </p:sp>
+      <p:sp>
+        <p:nvSpPr>
+          <p:cNvPr id="18" name="Shape 16"/>
+          <p:cNvSpPr/>
+          <p:nvPr/>
+        </p:nvSpPr>
+        <p:spPr>
+          <a:xfrm>
+            <a:off x="658368" y="5084064"/>
             <a:ext cx="5394960" cy="0"/>
           </a:xfrm>
           <a:prstGeom prst="line">
@@ -3709,14 +3609,14 @@
       </p:sp>
       <p:sp>
         <p:nvSpPr>
-          <p:cNvPr id="20" name="Text 18"/>
-          <p:cNvSpPr/>
-          <p:nvPr/>
-        </p:nvSpPr>
-        <p:spPr>
-          <a:xfrm>
-            <a:off x="658368" y="4992624"/>
-            <a:ext cx="2651760" cy="365760"/>
+          <p:cNvPr id="19" name="Text 17"/>
+          <p:cNvSpPr/>
+          <p:nvPr/>
+        </p:nvSpPr>
+        <p:spPr>
+          <a:xfrm>
+            <a:off x="658368" y="5157216"/>
+            <a:ext cx="2468880" cy="420624"/>
           </a:xfrm>
           <a:prstGeom prst="rect">
             <a:avLst/>
@@ -3732,7 +3632,7 @@
               <a:buNone/>
             </a:pPr>
             <a:r>
-              <a:rPr lang="en-US" sz="1250" dirty="0">
+              <a:rPr lang="en-US" sz="1800" dirty="0">
                 <a:solidFill>
                   <a:srgbClr val="8E9CB8"/>
                 </a:solidFill>
@@ -3742,20 +3642,20 @@
               </a:rPr>
               <a:t>Metric</a:t>
             </a:r>
-            <a:endParaRPr lang="en-US" sz="1250" dirty="0"/>
-          </a:p>
-        </p:txBody>
-      </p:sp>
-      <p:sp>
-        <p:nvSpPr>
-          <p:cNvPr id="21" name="Text 19"/>
-          <p:cNvSpPr/>
-          <p:nvPr/>
-        </p:nvSpPr>
-        <p:spPr>
-          <a:xfrm>
-            <a:off x="3346704" y="4992624"/>
-            <a:ext cx="2706624" cy="365760"/>
+            <a:endParaRPr lang="en-US" sz="1800" dirty="0"/>
+          </a:p>
+        </p:txBody>
+      </p:sp>
+      <p:sp>
+        <p:nvSpPr>
+          <p:cNvPr id="20" name="Text 18"/>
+          <p:cNvSpPr/>
+          <p:nvPr/>
+        </p:nvSpPr>
+        <p:spPr>
+          <a:xfrm>
+            <a:off x="3163824" y="5157216"/>
+            <a:ext cx="2889504" cy="420624"/>
           </a:xfrm>
           <a:prstGeom prst="rect">
             <a:avLst/>
@@ -3771,7 +3671,7 @@
               <a:buNone/>
             </a:pPr>
             <a:r>
-              <a:rPr lang="en-US" sz="1250" b="1" dirty="0">
+              <a:rPr lang="en-US" sz="1800" b="1" dirty="0">
                 <a:solidFill>
                   <a:srgbClr val="FFFFFF"/>
                 </a:solidFill>
@@ -3779,21 +3679,21 @@
                 <a:ea typeface="Calibri" pitchFamily="34" charset="-122"/>
                 <a:cs typeface="Calibri" pitchFamily="34" charset="-120"/>
               </a:rPr>
-              <a:t>F1 (“Left”), threshold 0.5</a:t>
-            </a:r>
-            <a:endParaRPr lang="en-US" sz="1250" dirty="0"/>
-          </a:p>
-        </p:txBody>
-      </p:sp>
-      <p:sp>
-        <p:nvSpPr>
-          <p:cNvPr id="22" name="Shape 20"/>
-          <p:cNvSpPr/>
-          <p:nvPr/>
-        </p:nvSpPr>
-        <p:spPr>
-          <a:xfrm>
-            <a:off x="658368" y="5394960"/>
+              <a:t>F1 (“Left”) @ 0.5</a:t>
+            </a:r>
+            <a:endParaRPr lang="en-US" sz="1800" dirty="0"/>
+          </a:p>
+        </p:txBody>
+      </p:sp>
+      <p:sp>
+        <p:nvSpPr>
+          <p:cNvPr id="21" name="Shape 19"/>
+          <p:cNvSpPr/>
+          <p:nvPr/>
+        </p:nvSpPr>
+        <p:spPr>
+          <a:xfrm>
+            <a:off x="658368" y="5632704"/>
             <a:ext cx="5394960" cy="0"/>
           </a:xfrm>
           <a:prstGeom prst="line">
@@ -3810,18 +3710,18 @@
       </p:sp>
       <p:sp>
         <p:nvSpPr>
-          <p:cNvPr id="23" name="Shape 21"/>
-          <p:cNvSpPr/>
-          <p:nvPr/>
-        </p:nvSpPr>
-        <p:spPr>
-          <a:xfrm>
-            <a:off x="6537960" y="914400"/>
-            <a:ext cx="4992624" cy="5074920"/>
+          <p:cNvPr id="22" name="Shape 20"/>
+          <p:cNvSpPr/>
+          <p:nvPr/>
+        </p:nvSpPr>
+        <p:spPr>
+          <a:xfrm>
+            <a:off x="6537960" y="1051560"/>
+            <a:ext cx="4992624" cy="4937760"/>
           </a:xfrm>
           <a:prstGeom prst="roundRect">
             <a:avLst>
-              <a:gd name="adj" fmla="val 916"/>
+              <a:gd name="adj" fmla="val 926"/>
             </a:avLst>
           </a:prstGeom>
           <a:solidFill>
@@ -3832,14 +3732,14 @@
       </p:sp>
       <p:sp>
         <p:nvSpPr>
-          <p:cNvPr id="24" name="Text 22"/>
-          <p:cNvSpPr/>
-          <p:nvPr/>
-        </p:nvSpPr>
-        <p:spPr>
-          <a:xfrm>
-            <a:off x="6830568" y="1188720"/>
-            <a:ext cx="4407408" cy="274320"/>
+          <p:cNvPr id="23" name="Text 21"/>
+          <p:cNvSpPr/>
+          <p:nvPr/>
+        </p:nvSpPr>
+        <p:spPr>
+          <a:xfrm>
+            <a:off x="6876288" y="1371600"/>
+            <a:ext cx="4389120" cy="292608"/>
           </a:xfrm>
           <a:prstGeom prst="rect">
             <a:avLst/>
@@ -3855,7 +3755,7 @@
               <a:buNone/>
             </a:pPr>
             <a:r>
-              <a:rPr lang="en-US" sz="1100" b="1" spc="110" kern="0" dirty="0">
+              <a:rPr lang="en-US" sz="1300" b="1" spc="110" kern="0" dirty="0">
                 <a:solidFill>
                   <a:srgbClr val="E3A140"/>
                 </a:solidFill>
@@ -3865,20 +3765,20 @@
               </a:rPr>
               <a:t>THE METRIC DICTATES THE STRATEGY</a:t>
             </a:r>
-            <a:endParaRPr lang="en-US" sz="1100" dirty="0"/>
-          </a:p>
-        </p:txBody>
-      </p:sp>
-      <p:sp>
-        <p:nvSpPr>
-          <p:cNvPr id="25" name="Text 23"/>
-          <p:cNvSpPr/>
-          <p:nvPr/>
-        </p:nvSpPr>
-        <p:spPr>
-          <a:xfrm>
-            <a:off x="6830568" y="1591056"/>
-            <a:ext cx="4407408" cy="1097280"/>
+            <a:endParaRPr lang="en-US" sz="1300" dirty="0"/>
+          </a:p>
+        </p:txBody>
+      </p:sp>
+      <p:sp>
+        <p:nvSpPr>
+          <p:cNvPr id="24" name="Text 22"/>
+          <p:cNvSpPr/>
+          <p:nvPr/>
+        </p:nvSpPr>
+        <p:spPr>
+          <a:xfrm>
+            <a:off x="6876288" y="1883664"/>
+            <a:ext cx="4389120" cy="365760"/>
           </a:xfrm>
           <a:prstGeom prst="rect">
             <a:avLst/>
@@ -3891,13 +3791,10 @@
           <a:lstStyle/>
           <a:p>
             <a:pPr indent="0" marL="0">
-              <a:lnSpc>
-                <a:spcPct val="122000"/>
-              </a:lnSpc>
               <a:buNone/>
             </a:pPr>
             <a:r>
-              <a:rPr lang="en-US" sz="1300" b="1" dirty="0">
+              <a:rPr lang="en-US" sz="2200" b="1" dirty="0">
                 <a:solidFill>
                   <a:srgbClr val="FFFFFF"/>
                 </a:solidFill>
@@ -3905,16 +3802,38 @@
                 <a:ea typeface="Calibri" pitchFamily="34" charset="-122"/>
                 <a:cs typeface="Calibri" pitchFamily="34" charset="-120"/>
               </a:rPr>
-              <a:t>Only the positive class scores. </a:t>
-            </a:r>
+              <a:t>Only the positive class scores.</a:t>
+            </a:r>
+            <a:endParaRPr lang="en-US" sz="2200" dirty="0"/>
+          </a:p>
+        </p:txBody>
+      </p:sp>
+      <p:sp>
+        <p:nvSpPr>
+          <p:cNvPr id="25" name="Text 23"/>
+          <p:cNvSpPr/>
+          <p:nvPr/>
+        </p:nvSpPr>
+        <p:spPr>
+          <a:xfrm>
+            <a:off x="6876288" y="2286000"/>
+            <a:ext cx="4389120" cy="329184"/>
+          </a:xfrm>
+          <a:prstGeom prst="rect">
+            <a:avLst/>
+          </a:prstGeom>
+          <a:noFill/>
+          <a:ln/>
+        </p:spPr>
+        <p:txBody>
+          <a:bodyPr wrap="square" lIns="0" tIns="0" rIns="0" bIns="0" rtlCol="0" anchor="ctr"/>
+          <a:lstStyle/>
+          <a:p>
             <a:pPr indent="0" marL="0">
-              <a:lnSpc>
-                <a:spcPct val="122000"/>
-              </a:lnSpc>
               <a:buNone/>
             </a:pPr>
             <a:r>
-              <a:rPr lang="en-US" sz="1300" dirty="0">
+              <a:rPr lang="en-US" sz="1800" dirty="0">
                 <a:solidFill>
                   <a:srgbClr val="C3CEE4"/>
                 </a:solidFill>
@@ -3922,9 +3841,9 @@
                 <a:ea typeface="Calibri" pitchFamily="34" charset="-122"/>
                 <a:cs typeface="Calibri" pitchFamily="34" charset="-120"/>
               </a:rPr>
-              <a:t>True negatives contribute nothing to F1, so a label is worth buying mainly if it is — or teaches us about — a “Left”.</a:t>
-            </a:r>
-            <a:endParaRPr lang="en-US" sz="1300" dirty="0"/>
+              <a:t>True negatives add nothing to F1.</a:t>
+            </a:r>
+            <a:endParaRPr lang="en-US" sz="1800" dirty="0"/>
           </a:p>
         </p:txBody>
       </p:sp>
@@ -3936,8 +3855,8 @@
         </p:nvSpPr>
         <p:spPr>
           <a:xfrm>
-            <a:off x="6830568" y="2779776"/>
-            <a:ext cx="4407408" cy="1097280"/>
+            <a:off x="6876288" y="3035808"/>
+            <a:ext cx="4389120" cy="365760"/>
           </a:xfrm>
           <a:prstGeom prst="rect">
             <a:avLst/>
@@ -3950,13 +3869,10 @@
           <a:lstStyle/>
           <a:p>
             <a:pPr indent="0" marL="0">
-              <a:lnSpc>
-                <a:spcPct val="122000"/>
-              </a:lnSpc>
               <a:buNone/>
             </a:pPr>
             <a:r>
-              <a:rPr lang="en-US" sz="1300" b="1" dirty="0">
+              <a:rPr lang="en-US" sz="2200" b="1" dirty="0">
                 <a:solidFill>
                   <a:srgbClr val="FFFFFF"/>
                 </a:solidFill>
@@ -3964,16 +3880,41 @@
                 <a:ea typeface="Calibri" pitchFamily="34" charset="-122"/>
                 <a:cs typeface="Calibri" pitchFamily="34" charset="-120"/>
               </a:rPr>
-              <a:t>The 0.5 threshold is welded shut. </a:t>
-            </a:r>
+              <a:t>The 0.5 threshold is frozen.</a:t>
+            </a:r>
+            <a:endParaRPr lang="en-US" sz="2200" dirty="0"/>
+          </a:p>
+        </p:txBody>
+      </p:sp>
+      <p:sp>
+        <p:nvSpPr>
+          <p:cNvPr id="27" name="Text 25"/>
+          <p:cNvSpPr/>
+          <p:nvPr/>
+        </p:nvSpPr>
+        <p:spPr>
+          <a:xfrm>
+            <a:off x="6876288" y="3438144"/>
+            <a:ext cx="4389120" cy="640080"/>
+          </a:xfrm>
+          <a:prstGeom prst="rect">
+            <a:avLst/>
+          </a:prstGeom>
+          <a:noFill/>
+          <a:ln/>
+        </p:spPr>
+        <p:txBody>
+          <a:bodyPr wrap="square" lIns="0" tIns="0" rIns="0" bIns="0" rtlCol="0" anchor="ctr"/>
+          <a:lstStyle/>
+          <a:p>
             <a:pPr indent="0" marL="0">
               <a:lnSpc>
-                <a:spcPct val="122000"/>
+                <a:spcPct val="116000"/>
               </a:lnSpc>
               <a:buNone/>
             </a:pPr>
             <a:r>
-              <a:rPr lang="en-US" sz="1300" dirty="0">
+              <a:rPr lang="en-US" sz="1800" dirty="0">
                 <a:solidFill>
                   <a:srgbClr val="C3CEE4"/>
                 </a:solidFill>
@@ -3981,41 +3922,19 @@
                 <a:ea typeface="Calibri" pitchFamily="34" charset="-122"/>
                 <a:cs typeface="Calibri" pitchFamily="34" charset="-120"/>
               </a:rPr>
-              <a:t>The grader calls predict(). We cannot tune it, so the only lever on precision/recall is what the forest is trained on.</a:t>
-            </a:r>
-            <a:endParaRPr lang="en-US" sz="1300" dirty="0"/>
-          </a:p>
-        </p:txBody>
-      </p:sp>
-      <p:sp>
-        <p:nvSpPr>
-          <p:cNvPr id="27" name="Text 25"/>
-          <p:cNvSpPr/>
-          <p:nvPr/>
-        </p:nvSpPr>
-        <p:spPr>
-          <a:xfrm>
-            <a:off x="6830568" y="3986784"/>
-            <a:ext cx="4407408" cy="868680"/>
-          </a:xfrm>
-          <a:prstGeom prst="rect">
-            <a:avLst/>
-          </a:prstGeom>
-          <a:noFill/>
-          <a:ln/>
-        </p:spPr>
-        <p:txBody>
-          <a:bodyPr wrap="square" lIns="0" tIns="0" rIns="0" bIns="0" rtlCol="0" anchor="ctr"/>
-          <a:lstStyle/>
+              <a:t>The grader calls predict(). The only</a:t>
+            </a:r>
+            <a:endParaRPr lang="en-US" sz="1800" dirty="0"/>
+          </a:p>
           <a:p>
             <a:pPr indent="0" marL="0">
               <a:lnSpc>
-                <a:spcPct val="122000"/>
+                <a:spcPct val="116000"/>
               </a:lnSpc>
               <a:buNone/>
             </a:pPr>
             <a:r>
-              <a:rPr lang="en-US" sz="1300" dirty="0">
+              <a:rPr lang="en-US" sz="1800" dirty="0">
                 <a:solidFill>
                   <a:srgbClr val="C3CEE4"/>
                 </a:solidFill>
@@ -4023,16 +3942,64 @@
                 <a:ea typeface="Calibri" pitchFamily="34" charset="-122"/>
                 <a:cs typeface="Calibri" pitchFamily="34" charset="-120"/>
               </a:rPr>
-              <a:t>Those two facts produced our two design choices: </a:t>
-            </a:r>
+              <a:t>lever left is what we train on.</a:t>
+            </a:r>
+            <a:endParaRPr lang="en-US" sz="1800" dirty="0"/>
+          </a:p>
+        </p:txBody>
+      </p:sp>
+      <p:sp>
+        <p:nvSpPr>
+          <p:cNvPr id="28" name="Shape 26"/>
+          <p:cNvSpPr/>
+          <p:nvPr/>
+        </p:nvSpPr>
+        <p:spPr>
+          <a:xfrm>
+            <a:off x="6876288" y="4370832"/>
+            <a:ext cx="4389120" cy="0"/>
+          </a:xfrm>
+          <a:prstGeom prst="line">
+            <a:avLst/>
+          </a:prstGeom>
+          <a:noFill/>
+          <a:ln w="12700">
+            <a:solidFill>
+              <a:srgbClr val="2C3A5C"/>
+            </a:solidFill>
+            <a:prstDash val="solid"/>
+          </a:ln>
+        </p:spPr>
+      </p:sp>
+      <p:sp>
+        <p:nvSpPr>
+          <p:cNvPr id="29" name="Text 27"/>
+          <p:cNvSpPr/>
+          <p:nvPr/>
+        </p:nvSpPr>
+        <p:spPr>
+          <a:xfrm>
+            <a:off x="6876288" y="4572000"/>
+            <a:ext cx="4389120" cy="786384"/>
+          </a:xfrm>
+          <a:prstGeom prst="rect">
+            <a:avLst/>
+          </a:prstGeom>
+          <a:noFill/>
+          <a:ln/>
+        </p:spPr>
+        <p:txBody>
+          <a:bodyPr wrap="square" lIns="0" tIns="0" rIns="0" bIns="0" rtlCol="0" anchor="ctr"/>
+          <a:lstStyle/>
+          <a:p>
             <a:pPr indent="0" marL="0">
               <a:lnSpc>
-                <a:spcPct val="122000"/>
+                <a:spcPct val="112000"/>
               </a:lnSpc>
               <a:buNone/>
             </a:pPr>
             <a:r>
-              <a:rPr lang="en-US" sz="1300" b="1" dirty="0">
+              <a:rPr lang="en-US" sz="2400" b="1" dirty="0">
                 <a:solidFill>
                   <a:srgbClr val="E3A140"/>
                 </a:solidFill>
@@ -4040,99 +4007,68 @@
                 <a:ea typeface="Calibri" pitchFamily="34" charset="-122"/>
                 <a:cs typeface="Calibri" pitchFamily="34" charset="-120"/>
               </a:rPr>
-              <a:t>hunt positives</a:t>
-            </a:r>
+              <a:t>So: hunt positives,</a:t>
+            </a:r>
+            <a:endParaRPr lang="en-US" sz="2400" dirty="0"/>
+          </a:p>
+          <a:p>
             <a:pPr indent="0" marL="0">
               <a:lnSpc>
-                <a:spcPct val="122000"/>
+                <a:spcPct val="112000"/>
               </a:lnSpc>
               <a:buNone/>
             </a:pPr>
             <a:r>
-              <a:rPr lang="en-US" sz="1300" dirty="0">
-                <a:solidFill>
-                  <a:srgbClr val="C3CEE4"/>
+              <a:rPr lang="en-US" sz="2400" b="1" dirty="0">
+                <a:solidFill>
+                  <a:srgbClr val="E3A140"/>
                 </a:solidFill>
                 <a:latin typeface="Calibri" pitchFamily="34" charset="0"/>
                 <a:ea typeface="Calibri" pitchFamily="34" charset="-122"/>
                 <a:cs typeface="Calibri" pitchFamily="34" charset="-120"/>
               </a:rPr>
-              <a:t>, then </a:t>
-            </a:r>
+              <a:t>then reweight.</a:t>
+            </a:r>
+            <a:endParaRPr lang="en-US" sz="2400" dirty="0"/>
+          </a:p>
+        </p:txBody>
+      </p:sp>
+      <p:sp>
+        <p:nvSpPr>
+          <p:cNvPr id="30" name="Text 28"/>
+          <p:cNvSpPr/>
+          <p:nvPr/>
+        </p:nvSpPr>
+        <p:spPr>
+          <a:xfrm>
+            <a:off x="6876288" y="5504688"/>
+            <a:ext cx="4389120" cy="292608"/>
+          </a:xfrm>
+          <a:prstGeom prst="rect">
+            <a:avLst/>
+          </a:prstGeom>
+          <a:noFill/>
+          <a:ln/>
+        </p:spPr>
+        <p:txBody>
+          <a:bodyPr wrap="square" lIns="0" tIns="0" rIns="0" bIns="0" rtlCol="0" anchor="ctr"/>
+          <a:lstStyle/>
+          <a:p>
             <a:pPr indent="0" marL="0">
-              <a:lnSpc>
-                <a:spcPct val="122000"/>
-              </a:lnSpc>
               <a:buNone/>
             </a:pPr>
             <a:r>
-              <a:rPr lang="en-US" sz="1300" b="1" dirty="0">
-                <a:solidFill>
-                  <a:srgbClr val="E3A140"/>
+              <a:rPr lang="en-US" sz="1300" dirty="0">
+                <a:solidFill>
+                  <a:srgbClr val="8E9CB8"/>
                 </a:solidFill>
                 <a:latin typeface="Calibri" pitchFamily="34" charset="0"/>
                 <a:ea typeface="Calibri" pitchFamily="34" charset="-122"/>
                 <a:cs typeface="Calibri" pitchFamily="34" charset="-120"/>
               </a:rPr>
-              <a:t>reweight by duplication</a:t>
-            </a:r>
-            <a:pPr indent="0" marL="0">
-              <a:lnSpc>
-                <a:spcPct val="122000"/>
-              </a:lnSpc>
-              <a:buNone/>
-            </a:pPr>
-            <a:r>
-              <a:rPr lang="en-US" sz="1300" dirty="0">
-                <a:solidFill>
-                  <a:srgbClr val="C3CEE4"/>
-                </a:solidFill>
-                <a:latin typeface="Calibri" pitchFamily="34" charset="0"/>
-                <a:ea typeface="Calibri" pitchFamily="34" charset="-122"/>
-                <a:cs typeface="Calibri" pitchFamily="34" charset="-120"/>
-              </a:rPr>
-              <a:t>.</a:t>
+              <a:t>Raz Ben Aharon  ·  Lior Malachi</a:t>
             </a:r>
             <a:endParaRPr lang="en-US" sz="1300" dirty="0"/>
-          </a:p>
-        </p:txBody>
-      </p:sp>
-      <p:sp>
-        <p:nvSpPr>
-          <p:cNvPr id="28" name="Text 26"/>
-          <p:cNvSpPr/>
-          <p:nvPr/>
-        </p:nvSpPr>
-        <p:spPr>
-          <a:xfrm>
-            <a:off x="6830568" y="5285232"/>
-            <a:ext cx="4407408" cy="274320"/>
-          </a:xfrm>
-          <a:prstGeom prst="rect">
-            <a:avLst/>
-          </a:prstGeom>
-          <a:noFill/>
-          <a:ln/>
-        </p:spPr>
-        <p:txBody>
-          <a:bodyPr wrap="square" lIns="0" tIns="0" rIns="0" bIns="0" rtlCol="0" anchor="ctr"/>
-          <a:lstStyle/>
-          <a:p>
-            <a:pPr indent="0" marL="0">
-              <a:buNone/>
-            </a:pPr>
-            <a:r>
-              <a:rPr lang="en-US" sz="1150" dirty="0">
-                <a:solidFill>
-                  <a:srgbClr val="8E9CB8"/>
-                </a:solidFill>
-                <a:latin typeface="Calibri" pitchFamily="34" charset="0"/>
-                <a:ea typeface="Calibri" pitchFamily="34" charset="-122"/>
-                <a:cs typeface="Calibri" pitchFamily="34" charset="-120"/>
-              </a:rPr>
-              <a:t>Raz Ben Aharon   ·   Lior Malachi</a:t>
-            </a:r>
-            <a:endParaRPr lang="en-US" sz="1150" dirty="0"/>
           </a:p>
         </p:txBody>
       </p:sp>
@@ -4176,8 +4112,8 @@
         </p:nvSpPr>
         <p:spPr>
           <a:xfrm>
-            <a:off x="10287000" y="457200"/>
-            <a:ext cx="868680" cy="274320"/>
+            <a:off x="10204704" y="457200"/>
+            <a:ext cx="950976" cy="310896"/>
           </a:xfrm>
           <a:prstGeom prst="roundRect">
             <a:avLst>
@@ -4198,8 +4134,8 @@
         </p:nvSpPr>
         <p:spPr>
           <a:xfrm>
-            <a:off x="10287000" y="457200"/>
-            <a:ext cx="868680" cy="274320"/>
+            <a:off x="10204704" y="457200"/>
+            <a:ext cx="950976" cy="310896"/>
           </a:xfrm>
           <a:prstGeom prst="rect">
             <a:avLst/>
@@ -4215,7 +4151,7 @@
               <a:buNone/>
             </a:pPr>
             <a:r>
-              <a:rPr lang="en-US" sz="1000" b="1" spc="100" kern="0" dirty="0">
+              <a:rPr lang="en-US" sz="1200" b="1" spc="100" kern="0" dirty="0">
                 <a:solidFill>
                   <a:srgbClr val="FFFFFF"/>
                 </a:solidFill>
@@ -4225,7 +4161,7 @@
               </a:rPr>
               <a:t>RAZ</a:t>
             </a:r>
-            <a:endParaRPr lang="en-US" sz="1000" dirty="0"/>
+            <a:endParaRPr lang="en-US" sz="1200" dirty="0"/>
           </a:p>
         </p:txBody>
       </p:sp>
@@ -4237,8 +4173,8 @@
         </p:nvSpPr>
         <p:spPr>
           <a:xfrm>
-            <a:off x="11265408" y="457200"/>
-            <a:ext cx="466344" cy="274320"/>
+            <a:off x="11228832" y="457200"/>
+            <a:ext cx="502920" cy="310896"/>
           </a:xfrm>
           <a:prstGeom prst="rect">
             <a:avLst/>
@@ -4254,7 +4190,7 @@
               <a:buNone/>
             </a:pPr>
             <a:r>
-              <a:rPr lang="en-US" sz="1000" dirty="0">
+              <a:rPr lang="en-US" sz="1200" dirty="0">
                 <a:solidFill>
                   <a:srgbClr val="7C8797"/>
                 </a:solidFill>
@@ -4264,7 +4200,7 @@
               </a:rPr>
               <a:t>2 / 6</a:t>
             </a:r>
-            <a:endParaRPr lang="en-US" sz="1000" dirty="0"/>
+            <a:endParaRPr lang="en-US" sz="1200" dirty="0"/>
           </a:p>
         </p:txBody>
       </p:sp>
@@ -4276,8 +4212,8 @@
         </p:nvSpPr>
         <p:spPr>
           <a:xfrm>
-            <a:off x="658368" y="658368"/>
-            <a:ext cx="9509760" cy="685800"/>
+            <a:off x="658368" y="640080"/>
+            <a:ext cx="9509760" cy="777240"/>
           </a:xfrm>
           <a:prstGeom prst="rect">
             <a:avLst/>
@@ -4293,7 +4229,7 @@
               <a:buNone/>
             </a:pPr>
             <a:r>
-              <a:rPr lang="en-US" sz="3000" b="1" dirty="0">
+              <a:rPr lang="en-US" sz="3800" b="1" dirty="0">
                 <a:solidFill>
                   <a:srgbClr val="1B2436"/>
                 </a:solidFill>
@@ -4301,9 +4237,9 @@
                 <a:ea typeface="Cambria" pitchFamily="34" charset="-122"/>
                 <a:cs typeface="Cambria" pitchFamily="34" charset="-120"/>
               </a:rPr>
-              <a:t>Hunt positives, don’t refine the boundary</a:t>
-            </a:r>
-            <a:endParaRPr lang="en-US" sz="3000" dirty="0"/>
+              <a:t>Hunt positives, don’t refine</a:t>
+            </a:r>
+            <a:endParaRPr lang="en-US" sz="3800" dirty="0"/>
           </a:p>
         </p:txBody>
       </p:sp>
@@ -4315,8 +4251,8 @@
         </p:nvSpPr>
         <p:spPr>
           <a:xfrm>
-            <a:off x="658368" y="1389888"/>
-            <a:ext cx="10607040" cy="457200"/>
+            <a:off x="658368" y="1481328"/>
+            <a:ext cx="10607040" cy="384048"/>
           </a:xfrm>
           <a:prstGeom prst="rect">
             <a:avLst/>
@@ -4332,7 +4268,7 @@
               <a:buNone/>
             </a:pPr>
             <a:r>
-              <a:rPr lang="en-US" sz="1400" dirty="0">
+              <a:rPr lang="en-US" sz="2000" dirty="0">
                 <a:solidFill>
                   <a:srgbClr val="4A5568"/>
                 </a:solidFill>
@@ -4340,9 +4276,9 @@
                 <a:ea typeface="Calibri" pitchFamily="34" charset="-122"/>
                 <a:cs typeface="Calibri" pitchFamily="34" charset="-120"/>
               </a:rPr>
-              <a:t>Same 5,000-query budget, three acquisition rules. Textbook uncertainty sampling loses to simply asking for the most-likely positives.</a:t>
-            </a:r>
-            <a:endParaRPr lang="en-US" sz="1400" dirty="0"/>
+              <a:t>Same 5,000-query budget. Three acquisition rules.</a:t>
+            </a:r>
+            <a:endParaRPr lang="en-US" sz="2000" dirty="0"/>
           </a:p>
         </p:txBody>
       </p:sp>
@@ -4354,8 +4290,8 @@
         </p:nvSpPr>
         <p:spPr>
           <a:xfrm>
-            <a:off x="658368" y="1920240"/>
-            <a:ext cx="5486400" cy="219456"/>
+            <a:off x="658368" y="1975104"/>
+            <a:ext cx="5394960" cy="274320"/>
           </a:xfrm>
           <a:prstGeom prst="rect">
             <a:avLst/>
@@ -4371,7 +4307,7 @@
               <a:buNone/>
             </a:pPr>
             <a:r>
-              <a:rPr lang="en-US" sz="1200" b="1" dirty="0">
+              <a:rPr lang="en-US" sz="1600" b="1" dirty="0">
                 <a:solidFill>
                   <a:srgbClr val="1B2436"/>
                 </a:solidFill>
@@ -4379,60 +4315,21 @@
                 <a:ea typeface="Calibri" pitchFamily="34" charset="-122"/>
                 <a:cs typeface="Calibri" pitchFamily="34" charset="-120"/>
               </a:rPr>
-              <a:t>True positives bought with 5,000 queries</a:t>
-            </a:r>
-            <a:endParaRPr lang="en-US" sz="1200" dirty="0"/>
-          </a:p>
-        </p:txBody>
-      </p:sp>
-      <p:sp>
-        <p:nvSpPr>
-          <p:cNvPr id="8" name="Text 6"/>
-          <p:cNvSpPr/>
-          <p:nvPr/>
-        </p:nvSpPr>
-        <p:spPr>
-          <a:xfrm>
-            <a:off x="658368" y="2121408"/>
-            <a:ext cx="5486400" cy="201168"/>
-          </a:xfrm>
-          <a:prstGeom prst="rect">
-            <a:avLst/>
-          </a:prstGeom>
-          <a:noFill/>
-          <a:ln/>
-        </p:spPr>
-        <p:txBody>
-          <a:bodyPr wrap="square" lIns="0" tIns="0" rIns="0" bIns="0" rtlCol="0" anchor="ctr"/>
-          <a:lstStyle/>
-          <a:p>
-            <a:pPr indent="0" marL="0">
-              <a:buNone/>
-            </a:pPr>
-            <a:r>
-              <a:rPr lang="en-US" sz="1050" dirty="0">
-                <a:solidFill>
-                  <a:srgbClr val="7C8797"/>
-                </a:solidFill>
-                <a:latin typeface="Calibri" pitchFamily="34" charset="0"/>
-                <a:ea typeface="Calibri" pitchFamily="34" charset="-122"/>
-                <a:cs typeface="Calibri" pitchFamily="34" charset="-120"/>
-              </a:rPr>
-              <a:t>Hit rate — Random 33.0% (= base rate) · Uncertainty 48.2% · Hunting 62.8%</a:t>
-            </a:r>
-            <a:endParaRPr lang="en-US" sz="1050" dirty="0"/>
+              <a:t>True positives bought</a:t>
+            </a:r>
+            <a:endParaRPr lang="en-US" sz="1600" dirty="0"/>
           </a:p>
         </p:txBody>
       </p:sp>
       <p:graphicFrame>
         <p:nvGraphicFramePr>
-          <p:cNvPr id="9" name="Chart 0" descr=""/>
+          <p:cNvPr id="8" name="Chart 0" descr=""/>
           <p:cNvGraphicFramePr/>
           <p:nvPr/>
         </p:nvGraphicFramePr>
         <p:xfrm>
-          <a:off x="548640" y="2340864"/>
-          <a:ext cx="5394960" cy="2926080"/>
+          <a:off x="548640" y="2286000"/>
+          <a:ext cx="5394960" cy="3017520"/>
         </p:xfrm>
         <a:graphic xmlns:a="http://schemas.openxmlformats.org/drawingml/2006/main">
           <a:graphicData uri="http://schemas.openxmlformats.org/drawingml/2006/chart">
@@ -4442,14 +4339,14 @@
       </p:graphicFrame>
       <p:sp>
         <p:nvSpPr>
-          <p:cNvPr id="10" name="Text 7"/>
-          <p:cNvSpPr/>
-          <p:nvPr/>
-        </p:nvSpPr>
-        <p:spPr>
-          <a:xfrm>
-            <a:off x="658368" y="5321808"/>
-            <a:ext cx="5303520" cy="219456"/>
+          <p:cNvPr id="9" name="Text 6"/>
+          <p:cNvSpPr/>
+          <p:nvPr/>
+        </p:nvSpPr>
+        <p:spPr>
+          <a:xfrm>
+            <a:off x="658368" y="5394960"/>
+            <a:ext cx="5394960" cy="274320"/>
           </a:xfrm>
           <a:prstGeom prst="rect">
             <a:avLst/>
@@ -4465,7 +4362,7 @@
               <a:buNone/>
             </a:pPr>
             <a:r>
-              <a:rPr lang="en-US" sz="1050" i="1" dirty="0">
+              <a:rPr lang="en-US" sz="1300" dirty="0">
                 <a:solidFill>
                   <a:srgbClr val="7C8797"/>
                 </a:solidFill>
@@ -4473,22 +4370,22 @@
                 <a:ea typeface="Calibri" pitchFamily="34" charset="-122"/>
                 <a:cs typeface="Calibri" pitchFamily="34" charset="-120"/>
               </a:rPr>
-              <a:t>A blind 5,000 queries returns ~1,650 — hunting nearly doubles the yield.</a:t>
-            </a:r>
-            <a:endParaRPr lang="en-US" sz="1050" dirty="0"/>
-          </a:p>
-        </p:txBody>
-      </p:sp>
-      <p:sp>
-        <p:nvSpPr>
-          <p:cNvPr id="11" name="Text 8"/>
-          <p:cNvSpPr/>
-          <p:nvPr/>
-        </p:nvSpPr>
-        <p:spPr>
-          <a:xfrm>
-            <a:off x="6227064" y="1920240"/>
-            <a:ext cx="5303520" cy="219456"/>
+              <a:t>Hit rate  33.0%  ·  48.2%  ·  62.8%</a:t>
+            </a:r>
+            <a:endParaRPr lang="en-US" sz="1300" dirty="0"/>
+          </a:p>
+        </p:txBody>
+      </p:sp>
+      <p:sp>
+        <p:nvSpPr>
+          <p:cNvPr id="10" name="Text 7"/>
+          <p:cNvSpPr/>
+          <p:nvPr/>
+        </p:nvSpPr>
+        <p:spPr>
+          <a:xfrm>
+            <a:off x="6227064" y="1975104"/>
+            <a:ext cx="5303520" cy="274320"/>
           </a:xfrm>
           <a:prstGeom prst="rect">
             <a:avLst/>
@@ -4504,7 +4401,7 @@
               <a:buNone/>
             </a:pPr>
             <a:r>
-              <a:rPr lang="en-US" sz="1200" b="1" dirty="0">
+              <a:rPr lang="en-US" sz="1600" b="1" dirty="0">
                 <a:solidFill>
                   <a:srgbClr val="1B2436"/>
                 </a:solidFill>
@@ -4512,60 +4409,21 @@
                 <a:ea typeface="Calibri" pitchFamily="34" charset="-122"/>
                 <a:cs typeface="Calibri" pitchFamily="34" charset="-120"/>
               </a:rPr>
-              <a:t>Resulting mean F1 (“Left”), seeds 1–3</a:t>
-            </a:r>
-            <a:endParaRPr lang="en-US" sz="1200" dirty="0"/>
-          </a:p>
-        </p:txBody>
-      </p:sp>
-      <p:sp>
-        <p:nvSpPr>
-          <p:cNvPr id="12" name="Text 9"/>
-          <p:cNvSpPr/>
-          <p:nvPr/>
-        </p:nvSpPr>
-        <p:spPr>
-          <a:xfrm>
-            <a:off x="6227064" y="2121408"/>
-            <a:ext cx="5303520" cy="201168"/>
-          </a:xfrm>
-          <a:prstGeom prst="rect">
-            <a:avLst/>
-          </a:prstGeom>
-          <a:noFill/>
-          <a:ln/>
-        </p:spPr>
-        <p:txBody>
-          <a:bodyPr wrap="square" lIns="0" tIns="0" rIns="0" bIns="0" rtlCol="0" anchor="ctr"/>
-          <a:lstStyle/>
-          <a:p>
-            <a:pPr indent="0" marL="0">
-              <a:buNone/>
-            </a:pPr>
-            <a:r>
-              <a:rPr lang="en-US" sz="1050" dirty="0">
-                <a:solidFill>
-                  <a:srgbClr val="7C8797"/>
-                </a:solidFill>
-                <a:latin typeface="Calibri" pitchFamily="34" charset="0"/>
-                <a:ea typeface="Calibri" pitchFamily="34" charset="-122"/>
-                <a:cs typeface="Calibri" pitchFamily="34" charset="-120"/>
-              </a:rPr>
-              <a:t>Final model, identical 2x duplication in all three</a:t>
-            </a:r>
-            <a:endParaRPr lang="en-US" sz="1050" dirty="0"/>
+              <a:t>Resulting mean F1 (“Left”)</a:t>
+            </a:r>
+            <a:endParaRPr lang="en-US" sz="1600" dirty="0"/>
           </a:p>
         </p:txBody>
       </p:sp>
       <p:graphicFrame>
         <p:nvGraphicFramePr>
-          <p:cNvPr id="13" name="Chart 1" descr=""/>
+          <p:cNvPr id="11" name="Chart 1" descr=""/>
           <p:cNvGraphicFramePr/>
           <p:nvPr/>
         </p:nvGraphicFramePr>
         <p:xfrm>
-          <a:off x="6126480" y="2340864"/>
-          <a:ext cx="5394960" cy="2926080"/>
+          <a:off x="6126480" y="2286000"/>
+          <a:ext cx="5394960" cy="3017520"/>
         </p:xfrm>
         <a:graphic xmlns:a="http://schemas.openxmlformats.org/drawingml/2006/main">
           <a:graphicData uri="http://schemas.openxmlformats.org/drawingml/2006/chart">
@@ -4575,14 +4433,14 @@
       </p:graphicFrame>
       <p:sp>
         <p:nvSpPr>
-          <p:cNvPr id="14" name="Text 10"/>
-          <p:cNvSpPr/>
-          <p:nvPr/>
-        </p:nvSpPr>
-        <p:spPr>
-          <a:xfrm>
-            <a:off x="6227064" y="5321808"/>
-            <a:ext cx="5303520" cy="219456"/>
+          <p:cNvPr id="12" name="Text 8"/>
+          <p:cNvSpPr/>
+          <p:nvPr/>
+        </p:nvSpPr>
+        <p:spPr>
+          <a:xfrm>
+            <a:off x="6227064" y="5394960"/>
+            <a:ext cx="5303520" cy="274320"/>
           </a:xfrm>
           <a:prstGeom prst="rect">
             <a:avLst/>
@@ -4598,7 +4456,7 @@
               <a:buNone/>
             </a:pPr>
             <a:r>
-              <a:rPr lang="en-US" sz="1050" b="1" dirty="0">
+              <a:rPr lang="en-US" sz="1300" b="1" dirty="0">
                 <a:solidFill>
                   <a:srgbClr val="15803D"/>
                 </a:solidFill>
@@ -4612,7 +4470,7 @@
               <a:buNone/>
             </a:pPr>
             <a:r>
-              <a:rPr lang="en-US" sz="1050" dirty="0">
+              <a:rPr lang="en-US" sz="1300" dirty="0">
                 <a:solidFill>
                   <a:srgbClr val="7C8797"/>
                 </a:solidFill>
@@ -4620,186 +4478,84 @@
                 <a:ea typeface="Calibri" pitchFamily="34" charset="-122"/>
                 <a:cs typeface="Calibri" pitchFamily="34" charset="-120"/>
               </a:rPr>
-              <a:t> over uncertainty sampling  ·  </a:t>
-            </a:r>
+              <a:t> vs uncertainty</a:t>
+            </a:r>
+            <a:endParaRPr lang="en-US" sz="1300" dirty="0"/>
+          </a:p>
+        </p:txBody>
+      </p:sp>
+      <p:sp>
+        <p:nvSpPr>
+          <p:cNvPr id="13" name="Shape 9"/>
+          <p:cNvSpPr/>
+          <p:nvPr/>
+        </p:nvSpPr>
+        <p:spPr>
+          <a:xfrm>
+            <a:off x="658368" y="5760720"/>
+            <a:ext cx="10872216" cy="640080"/>
+          </a:xfrm>
+          <a:prstGeom prst="roundRect">
+            <a:avLst>
+              <a:gd name="adj" fmla="val 8571"/>
+            </a:avLst>
+          </a:prstGeom>
+          <a:solidFill>
+            <a:srgbClr val="F4F6F9"/>
+          </a:solidFill>
+          <a:ln/>
+        </p:spPr>
+      </p:sp>
+      <p:sp>
+        <p:nvSpPr>
+          <p:cNvPr id="14" name="Text 10"/>
+          <p:cNvSpPr/>
+          <p:nvPr/>
+        </p:nvSpPr>
+        <p:spPr>
+          <a:xfrm>
+            <a:off x="896112" y="5760720"/>
+            <a:ext cx="10396728" cy="640080"/>
+          </a:xfrm>
+          <a:prstGeom prst="rect">
+            <a:avLst/>
+          </a:prstGeom>
+          <a:noFill/>
+          <a:ln/>
+        </p:spPr>
+        <p:txBody>
+          <a:bodyPr wrap="square" lIns="0" tIns="0" rIns="0" bIns="0" rtlCol="0" anchor="ctr"/>
+          <a:lstStyle/>
+          <a:p>
             <a:pPr indent="0" marL="0">
               <a:buNone/>
             </a:pPr>
             <a:r>
-              <a:rPr lang="en-US" sz="1050" b="1" dirty="0">
-                <a:solidFill>
-                  <a:srgbClr val="15803D"/>
+              <a:rPr lang="en-US" sz="1800" b="1" dirty="0">
+                <a:solidFill>
+                  <a:srgbClr val="1B2436"/>
                 </a:solidFill>
                 <a:latin typeface="Calibri" pitchFamily="34" charset="0"/>
                 <a:ea typeface="Calibri" pitchFamily="34" charset="-122"/>
                 <a:cs typeface="Calibri" pitchFamily="34" charset="-120"/>
               </a:rPr>
-              <a:t>+0.0347</a:t>
+              <a:t>More positives ⇒ higher F1. </a:t>
             </a:r>
             <a:pPr indent="0" marL="0">
               <a:buNone/>
             </a:pPr>
             <a:r>
-              <a:rPr lang="en-US" sz="1050" dirty="0">
-                <a:solidFill>
-                  <a:srgbClr val="7C8797"/>
+              <a:rPr lang="en-US" sz="1800" dirty="0">
+                <a:solidFill>
+                  <a:srgbClr val="1B2436"/>
                 </a:solidFill>
                 <a:latin typeface="Calibri" pitchFamily="34" charset="0"/>
                 <a:ea typeface="Calibri" pitchFamily="34" charset="-122"/>
                 <a:cs typeface="Calibri" pitchFamily="34" charset="-120"/>
               </a:rPr>
-              <a:t> over random</a:t>
-            </a:r>
-            <a:endParaRPr lang="en-US" sz="1050" dirty="0"/>
-          </a:p>
-        </p:txBody>
-      </p:sp>
-      <p:sp>
-        <p:nvSpPr>
-          <p:cNvPr id="15" name="Shape 11"/>
-          <p:cNvSpPr/>
-          <p:nvPr/>
-        </p:nvSpPr>
-        <p:spPr>
-          <a:xfrm>
-            <a:off x="658368" y="5760720"/>
-            <a:ext cx="10872216" cy="640080"/>
-          </a:xfrm>
-          <a:prstGeom prst="roundRect">
-            <a:avLst>
-              <a:gd name="adj" fmla="val 8571"/>
-            </a:avLst>
-          </a:prstGeom>
-          <a:solidFill>
-            <a:srgbClr val="F4F6F9"/>
-          </a:solidFill>
-          <a:ln/>
-        </p:spPr>
-      </p:sp>
-      <p:sp>
-        <p:nvSpPr>
-          <p:cNvPr id="16" name="Text 12"/>
-          <p:cNvSpPr/>
-          <p:nvPr/>
-        </p:nvSpPr>
-        <p:spPr>
-          <a:xfrm>
-            <a:off x="868680" y="5760720"/>
-            <a:ext cx="10451592" cy="640080"/>
-          </a:xfrm>
-          <a:prstGeom prst="rect">
-            <a:avLst/>
-          </a:prstGeom>
-          <a:noFill/>
-          <a:ln/>
-        </p:spPr>
-        <p:txBody>
-          <a:bodyPr wrap="square" lIns="0" tIns="0" rIns="0" bIns="0" rtlCol="0" anchor="ctr"/>
-          <a:lstStyle/>
-          <a:p>
-            <a:pPr indent="0" marL="0">
-              <a:lnSpc>
-                <a:spcPct val="112000"/>
-              </a:lnSpc>
-              <a:buNone/>
-            </a:pPr>
-            <a:r>
-              <a:rPr lang="en-US" sz="1250" b="1" dirty="0">
-                <a:solidFill>
-                  <a:srgbClr val="1B2436"/>
-                </a:solidFill>
-                <a:latin typeface="Calibri" pitchFamily="34" charset="0"/>
-                <a:ea typeface="Calibri" pitchFamily="34" charset="-122"/>
-                <a:cs typeface="Calibri" pitchFamily="34" charset="-120"/>
-              </a:rPr>
-              <a:t>More positives ⇒ higher F1, monotonically. </a:t>
-            </a:r>
-            <a:pPr indent="0" marL="0">
-              <a:lnSpc>
-                <a:spcPct val="112000"/>
-              </a:lnSpc>
-              <a:buNone/>
-            </a:pPr>
-            <a:r>
-              <a:rPr lang="en-US" sz="1250" dirty="0">
-                <a:solidFill>
-                  <a:srgbClr val="1B2436"/>
-                </a:solidFill>
-                <a:latin typeface="Calibri" pitchFamily="34" charset="0"/>
-                <a:ea typeface="Calibri" pitchFamily="34" charset="-122"/>
-                <a:cs typeface="Calibri" pitchFamily="34" charset="-120"/>
-              </a:rPr>
-              <a:t>Uncertainty sampling spends the budget near P=0.5, where labels are ambiguous but cheap to be wrong about — it buys </a:t>
-            </a:r>
-            <a:pPr indent="0" marL="0">
-              <a:lnSpc>
-                <a:spcPct val="112000"/>
-              </a:lnSpc>
-              <a:buNone/>
-            </a:pPr>
-            <a:r>
-              <a:rPr lang="en-US" sz="1250" b="1" dirty="0">
-                <a:solidFill>
-                  <a:srgbClr val="1B2436"/>
-                </a:solidFill>
-                <a:latin typeface="Calibri" pitchFamily="34" charset="0"/>
-                <a:ea typeface="Calibri" pitchFamily="34" charset="-122"/>
-                <a:cs typeface="Calibri" pitchFamily="34" charset="-120"/>
-              </a:rPr>
-              <a:t>732 fewer positives</a:t>
-            </a:r>
-            <a:pPr indent="0" marL="0">
-              <a:lnSpc>
-                <a:spcPct val="112000"/>
-              </a:lnSpc>
-              <a:buNone/>
-            </a:pPr>
-            <a:r>
-              <a:rPr lang="en-US" sz="1250" dirty="0">
-                <a:solidFill>
-                  <a:srgbClr val="1B2436"/>
-                </a:solidFill>
-                <a:latin typeface="Calibri" pitchFamily="34" charset="0"/>
-                <a:ea typeface="Calibri" pitchFamily="34" charset="-122"/>
-                <a:cs typeface="Calibri" pitchFamily="34" charset="-120"/>
-              </a:rPr>
-              <a:t> and loses </a:t>
-            </a:r>
-            <a:pPr indent="0" marL="0">
-              <a:lnSpc>
-                <a:spcPct val="112000"/>
-              </a:lnSpc>
-              <a:buNone/>
-            </a:pPr>
-            <a:r>
-              <a:rPr lang="en-US" sz="1250" b="1" dirty="0">
-                <a:solidFill>
-                  <a:srgbClr val="1B2436"/>
-                </a:solidFill>
-                <a:latin typeface="Calibri" pitchFamily="34" charset="0"/>
-                <a:ea typeface="Calibri" pitchFamily="34" charset="-122"/>
-                <a:cs typeface="Calibri" pitchFamily="34" charset="-120"/>
-              </a:rPr>
-              <a:t>0.0155</a:t>
-            </a:r>
-            <a:pPr indent="0" marL="0">
-              <a:lnSpc>
-                <a:spcPct val="112000"/>
-              </a:lnSpc>
-              <a:buNone/>
-            </a:pPr>
-            <a:r>
-              <a:rPr lang="en-US" sz="1250" dirty="0">
-                <a:solidFill>
-                  <a:srgbClr val="1B2436"/>
-                </a:solidFill>
-                <a:latin typeface="Calibri" pitchFamily="34" charset="0"/>
-                <a:ea typeface="Calibri" pitchFamily="34" charset="-122"/>
-                <a:cs typeface="Calibri" pitchFamily="34" charset="-120"/>
-              </a:rPr>
-              <a:t> F1. When the metric is minority-class F1, the classic rule is the wrong rule.</a:t>
-            </a:r>
-            <a:endParaRPr lang="en-US" sz="1250" dirty="0"/>
+              <a:t>Uncertainty sampling buys 732 fewer — and loses 0.0155.</a:t>
+            </a:r>
+            <a:endParaRPr lang="en-US" sz="1800" dirty="0"/>
           </a:p>
         </p:txBody>
       </p:sp>
@@ -4843,8 +4599,8 @@
         </p:nvSpPr>
         <p:spPr>
           <a:xfrm>
-            <a:off x="10287000" y="457200"/>
-            <a:ext cx="868680" cy="274320"/>
+            <a:off x="10204704" y="457200"/>
+            <a:ext cx="950976" cy="310896"/>
           </a:xfrm>
           <a:prstGeom prst="roundRect">
             <a:avLst>
@@ -4865,8 +4621,8 @@
         </p:nvSpPr>
         <p:spPr>
           <a:xfrm>
-            <a:off x="10287000" y="457200"/>
-            <a:ext cx="868680" cy="274320"/>
+            <a:off x="10204704" y="457200"/>
+            <a:ext cx="950976" cy="310896"/>
           </a:xfrm>
           <a:prstGeom prst="rect">
             <a:avLst/>
@@ -4882,7 +4638,7 @@
               <a:buNone/>
             </a:pPr>
             <a:r>
-              <a:rPr lang="en-US" sz="1000" b="1" spc="100" kern="0" dirty="0">
+              <a:rPr lang="en-US" sz="1200" b="1" spc="100" kern="0" dirty="0">
                 <a:solidFill>
                   <a:srgbClr val="FFFFFF"/>
                 </a:solidFill>
@@ -4892,7 +4648,7 @@
               </a:rPr>
               <a:t>LIOR</a:t>
             </a:r>
-            <a:endParaRPr lang="en-US" sz="1000" dirty="0"/>
+            <a:endParaRPr lang="en-US" sz="1200" dirty="0"/>
           </a:p>
         </p:txBody>
       </p:sp>
@@ -4904,8 +4660,8 @@
         </p:nvSpPr>
         <p:spPr>
           <a:xfrm>
-            <a:off x="11265408" y="457200"/>
-            <a:ext cx="466344" cy="274320"/>
+            <a:off x="11228832" y="457200"/>
+            <a:ext cx="502920" cy="310896"/>
           </a:xfrm>
           <a:prstGeom prst="rect">
             <a:avLst/>
@@ -4921,7 +4677,7 @@
               <a:buNone/>
             </a:pPr>
             <a:r>
-              <a:rPr lang="en-US" sz="1000" dirty="0">
+              <a:rPr lang="en-US" sz="1200" dirty="0">
                 <a:solidFill>
                   <a:srgbClr val="7C8797"/>
                 </a:solidFill>
@@ -4931,7 +4687,7 @@
               </a:rPr>
               <a:t>3 / 6</a:t>
             </a:r>
-            <a:endParaRPr lang="en-US" sz="1000" dirty="0"/>
+            <a:endParaRPr lang="en-US" sz="1200" dirty="0"/>
           </a:p>
         </p:txBody>
       </p:sp>
@@ -4943,8 +4699,8 @@
         </p:nvSpPr>
         <p:spPr>
           <a:xfrm>
-            <a:off x="658368" y="658368"/>
-            <a:ext cx="9509760" cy="685800"/>
+            <a:off x="658368" y="640080"/>
+            <a:ext cx="9509760" cy="777240"/>
           </a:xfrm>
           <a:prstGeom prst="rect">
             <a:avLst/>
@@ -4960,7 +4716,7 @@
               <a:buNone/>
             </a:pPr>
             <a:r>
-              <a:rPr lang="en-US" sz="3000" b="1" dirty="0">
+              <a:rPr lang="en-US" sz="3800" b="1" dirty="0">
                 <a:solidFill>
                   <a:srgbClr val="1B2436"/>
                 </a:solidFill>
@@ -4970,7 +4726,7 @@
               </a:rPr>
               <a:t>5 rounds beat one big order</a:t>
             </a:r>
-            <a:endParaRPr lang="en-US" sz="3000" dirty="0"/>
+            <a:endParaRPr lang="en-US" sz="3800" dirty="0"/>
           </a:p>
         </p:txBody>
       </p:sp>
@@ -4982,8 +4738,8 @@
         </p:nvSpPr>
         <p:spPr>
           <a:xfrm>
-            <a:off x="658368" y="1389888"/>
-            <a:ext cx="10607040" cy="457200"/>
+            <a:off x="658368" y="1481328"/>
+            <a:ext cx="10607040" cy="384048"/>
           </a:xfrm>
           <a:prstGeom prst="rect">
             <a:avLst/>
@@ -4999,7 +4755,7 @@
               <a:buNone/>
             </a:pPr>
             <a:r>
-              <a:rPr lang="en-US" sz="1400" dirty="0">
+              <a:rPr lang="en-US" sz="2000" dirty="0">
                 <a:solidFill>
                   <a:srgbClr val="4A5568"/>
                 </a:solidFill>
@@ -5007,9 +4763,9 @@
                 <a:ea typeface="Calibri" pitchFamily="34" charset="-122"/>
                 <a:cs typeface="Calibri" pitchFamily="34" charset="-120"/>
               </a:rPr>
-              <a:t>Retraining the scout between rounds sharpens its ranking — but each round strips the pool of easy positives, and the yield decays toward the base rate.</a:t>
-            </a:r>
-            <a:endParaRPr lang="en-US" sz="1400" dirty="0"/>
+              <a:t>Retraining the scout between rounds sharpens its ranking.</a:t>
+            </a:r>
+            <a:endParaRPr lang="en-US" sz="2000" dirty="0"/>
           </a:p>
         </p:txBody>
       </p:sp>
@@ -5021,8 +4777,8 @@
         </p:nvSpPr>
         <p:spPr>
           <a:xfrm>
-            <a:off x="658368" y="1920240"/>
-            <a:ext cx="7680960" cy="219456"/>
+            <a:off x="658368" y="1975104"/>
+            <a:ext cx="7680960" cy="274320"/>
           </a:xfrm>
           <a:prstGeom prst="rect">
             <a:avLst/>
@@ -5038,7 +4794,7 @@
               <a:buNone/>
             </a:pPr>
             <a:r>
-              <a:rPr lang="en-US" sz="1200" b="1" dirty="0">
+              <a:rPr lang="en-US" sz="1600" b="1" dirty="0">
                 <a:solidFill>
                   <a:srgbClr val="1B2436"/>
                 </a:solidFill>
@@ -5048,58 +4804,19 @@
               </a:rPr>
               <a:t>Query precision per round — the vein runs out</a:t>
             </a:r>
-            <a:endParaRPr lang="en-US" sz="1200" dirty="0"/>
-          </a:p>
-        </p:txBody>
-      </p:sp>
-      <p:sp>
-        <p:nvSpPr>
-          <p:cNvPr id="8" name="Text 6"/>
-          <p:cNvSpPr/>
-          <p:nvPr/>
-        </p:nvSpPr>
-        <p:spPr>
-          <a:xfrm>
-            <a:off x="658368" y="2121408"/>
-            <a:ext cx="7680960" cy="201168"/>
-          </a:xfrm>
-          <a:prstGeom prst="rect">
-            <a:avLst/>
-          </a:prstGeom>
-          <a:noFill/>
-          <a:ln/>
-        </p:spPr>
-        <p:txBody>
-          <a:bodyPr wrap="square" lIns="0" tIns="0" rIns="0" bIns="0" rtlCol="0" anchor="ctr"/>
-          <a:lstStyle/>
-          <a:p>
-            <a:pPr indent="0" marL="0">
-              <a:buNone/>
-            </a:pPr>
-            <a:r>
-              <a:rPr lang="en-US" sz="1050" dirty="0">
-                <a:solidFill>
-                  <a:srgbClr val="7C8797"/>
-                </a:solidFill>
-                <a:latin typeface="Calibri" pitchFamily="34" charset="0"/>
-                <a:ea typeface="Calibri" pitchFamily="34" charset="-122"/>
-                <a:cs typeface="Calibri" pitchFamily="34" charset="-120"/>
-              </a:rPr>
-              <a:t>Share of each 1,000-query batch that came back “Left”. Mean of seeds 1–3.</a:t>
-            </a:r>
-            <a:endParaRPr lang="en-US" sz="1050" dirty="0"/>
+            <a:endParaRPr lang="en-US" sz="1600" dirty="0"/>
           </a:p>
         </p:txBody>
       </p:sp>
       <p:graphicFrame>
         <p:nvGraphicFramePr>
-          <p:cNvPr id="9" name="Chart 0" descr=""/>
+          <p:cNvPr id="8" name="Chart 0" descr=""/>
           <p:cNvGraphicFramePr/>
           <p:nvPr/>
         </p:nvGraphicFramePr>
         <p:xfrm>
-          <a:off x="548640" y="2340864"/>
-          <a:ext cx="7772400" cy="2926080"/>
+          <a:off x="548640" y="2286000"/>
+          <a:ext cx="7772400" cy="3017520"/>
         </p:xfrm>
         <a:graphic xmlns:a="http://schemas.openxmlformats.org/drawingml/2006/main">
           <a:graphicData uri="http://schemas.openxmlformats.org/drawingml/2006/chart">
@@ -5109,57 +4826,18 @@
       </p:graphicFrame>
       <p:sp>
         <p:nvSpPr>
-          <p:cNvPr id="10" name="Text 7"/>
-          <p:cNvSpPr/>
-          <p:nvPr/>
-        </p:nvSpPr>
-        <p:spPr>
-          <a:xfrm>
-            <a:off x="658368" y="5321808"/>
-            <a:ext cx="7680960" cy="219456"/>
-          </a:xfrm>
-          <a:prstGeom prst="rect">
-            <a:avLst/>
-          </a:prstGeom>
-          <a:noFill/>
-          <a:ln/>
-        </p:spPr>
-        <p:txBody>
-          <a:bodyPr wrap="square" lIns="0" tIns="0" rIns="0" bIns="0" rtlCol="0" anchor="ctr"/>
-          <a:lstStyle/>
-          <a:p>
-            <a:pPr indent="0" marL="0">
-              <a:buNone/>
-            </a:pPr>
-            <a:r>
-              <a:rPr lang="en-US" sz="1050" i="1" dirty="0">
-                <a:solidFill>
-                  <a:srgbClr val="7C8797"/>
-                </a:solidFill>
-                <a:latin typeface="Calibri" pitchFamily="34" charset="0"/>
-                <a:ea typeface="Calibri" pitchFamily="34" charset="-122"/>
-                <a:cs typeface="Calibri" pitchFamily="34" charset="-120"/>
-              </a:rPr>
-              <a:t>Positives bought per round: 795 · 782 · 608 · 512 · 443</a:t>
-            </a:r>
-            <a:endParaRPr lang="en-US" sz="1050" dirty="0"/>
-          </a:p>
-        </p:txBody>
-      </p:sp>
-      <p:sp>
-        <p:nvSpPr>
-          <p:cNvPr id="11" name="Shape 8"/>
-          <p:cNvSpPr/>
-          <p:nvPr/>
-        </p:nvSpPr>
-        <p:spPr>
-          <a:xfrm>
-            <a:off x="8549640" y="2340864"/>
-            <a:ext cx="2980944" cy="1371600"/>
+          <p:cNvPr id="9" name="Shape 6"/>
+          <p:cNvSpPr/>
+          <p:nvPr/>
+        </p:nvSpPr>
+        <p:spPr>
+          <a:xfrm>
+            <a:off x="8549640" y="2286000"/>
+            <a:ext cx="2980944" cy="1463040"/>
           </a:xfrm>
           <a:prstGeom prst="roundRect">
             <a:avLst>
-              <a:gd name="adj" fmla="val 3333"/>
+              <a:gd name="adj" fmla="val 3125"/>
             </a:avLst>
           </a:prstGeom>
           <a:solidFill>
@@ -5170,14 +4848,14 @@
       </p:sp>
       <p:sp>
         <p:nvSpPr>
-          <p:cNvPr id="12" name="Text 9"/>
-          <p:cNvSpPr/>
-          <p:nvPr/>
-        </p:nvSpPr>
-        <p:spPr>
-          <a:xfrm>
-            <a:off x="8778240" y="2468880"/>
-            <a:ext cx="2523744" cy="237744"/>
+          <p:cNvPr id="10" name="Text 7"/>
+          <p:cNvSpPr/>
+          <p:nvPr/>
+        </p:nvSpPr>
+        <p:spPr>
+          <a:xfrm>
+            <a:off x="8796528" y="2414016"/>
+            <a:ext cx="2487168" cy="256032"/>
           </a:xfrm>
           <a:prstGeom prst="rect">
             <a:avLst/>
@@ -5193,7 +4871,7 @@
               <a:buNone/>
             </a:pPr>
             <a:r>
-              <a:rPr lang="en-US" sz="1150" b="1" dirty="0">
+              <a:rPr lang="en-US" sz="1400" b="1" dirty="0">
                 <a:solidFill>
                   <a:srgbClr val="4A5568"/>
                 </a:solidFill>
@@ -5203,20 +4881,20 @@
               </a:rPr>
               <a:t>Iterative — 5 x 1,000</a:t>
             </a:r>
-            <a:endParaRPr lang="en-US" sz="1150" dirty="0"/>
-          </a:p>
-        </p:txBody>
-      </p:sp>
-      <p:sp>
-        <p:nvSpPr>
-          <p:cNvPr id="13" name="Text 10"/>
-          <p:cNvSpPr/>
-          <p:nvPr/>
-        </p:nvSpPr>
-        <p:spPr>
-          <a:xfrm>
-            <a:off x="8778240" y="2706624"/>
-            <a:ext cx="2523744" cy="548640"/>
+            <a:endParaRPr lang="en-US" sz="1400" dirty="0"/>
+          </a:p>
+        </p:txBody>
+      </p:sp>
+      <p:sp>
+        <p:nvSpPr>
+          <p:cNvPr id="11" name="Text 8"/>
+          <p:cNvSpPr/>
+          <p:nvPr/>
+        </p:nvSpPr>
+        <p:spPr>
+          <a:xfrm>
+            <a:off x="8796528" y="2688336"/>
+            <a:ext cx="2487168" cy="718312"/>
           </a:xfrm>
           <a:prstGeom prst="rect">
             <a:avLst/>
@@ -5232,7 +4910,7 @@
               <a:buNone/>
             </a:pPr>
             <a:r>
-              <a:rPr lang="en-US" sz="3800" b="1" dirty="0">
+              <a:rPr lang="en-US" sz="4400" b="1" dirty="0">
                 <a:solidFill>
                   <a:srgbClr val="B45309"/>
                 </a:solidFill>
@@ -5242,20 +4920,20 @@
               </a:rPr>
               <a:t>3,140</a:t>
             </a:r>
-            <a:endParaRPr lang="en-US" sz="3800" dirty="0"/>
-          </a:p>
-        </p:txBody>
-      </p:sp>
-      <p:sp>
-        <p:nvSpPr>
-          <p:cNvPr id="14" name="Text 11"/>
-          <p:cNvSpPr/>
-          <p:nvPr/>
-        </p:nvSpPr>
-        <p:spPr>
-          <a:xfrm>
-            <a:off x="8778240" y="3236976"/>
-            <a:ext cx="2523744" cy="475488"/>
+            <a:endParaRPr lang="en-US" sz="4400" dirty="0"/>
+          </a:p>
+        </p:txBody>
+      </p:sp>
+      <p:sp>
+        <p:nvSpPr>
+          <p:cNvPr id="12" name="Text 9"/>
+          <p:cNvSpPr/>
+          <p:nvPr/>
+        </p:nvSpPr>
+        <p:spPr>
+          <a:xfrm>
+            <a:off x="8796528" y="3406648"/>
+            <a:ext cx="2487168" cy="274320"/>
           </a:xfrm>
           <a:prstGeom prst="rect">
             <a:avLst/>
@@ -5271,7 +4949,7 @@
               <a:buNone/>
             </a:pPr>
             <a:r>
-              <a:rPr lang="en-US" sz="1100" dirty="0">
+              <a:rPr lang="en-US" sz="1300" dirty="0">
                 <a:solidFill>
                   <a:srgbClr val="7C8797"/>
                 </a:solidFill>
@@ -5279,26 +4957,26 @@
                 <a:ea typeface="Calibri" pitchFamily="34" charset="-122"/>
                 <a:cs typeface="Calibri" pitchFamily="34" charset="-120"/>
               </a:rPr>
-              <a:t>positives  ·  mean F1 0.6471</a:t>
-            </a:r>
-            <a:endParaRPr lang="en-US" sz="1100" dirty="0"/>
-          </a:p>
-        </p:txBody>
-      </p:sp>
-      <p:sp>
-        <p:nvSpPr>
-          <p:cNvPr id="15" name="Shape 12"/>
-          <p:cNvSpPr/>
-          <p:nvPr/>
-        </p:nvSpPr>
-        <p:spPr>
-          <a:xfrm>
-            <a:off x="8549640" y="3840480"/>
-            <a:ext cx="2980944" cy="1371600"/>
+              <a:t>positives  ·  F1 0.6471</a:t>
+            </a:r>
+            <a:endParaRPr lang="en-US" sz="1300" dirty="0"/>
+          </a:p>
+        </p:txBody>
+      </p:sp>
+      <p:sp>
+        <p:nvSpPr>
+          <p:cNvPr id="13" name="Shape 10"/>
+          <p:cNvSpPr/>
+          <p:nvPr/>
+        </p:nvSpPr>
+        <p:spPr>
+          <a:xfrm>
+            <a:off x="8549640" y="3877056"/>
+            <a:ext cx="2980944" cy="1463040"/>
           </a:xfrm>
           <a:prstGeom prst="roundRect">
             <a:avLst>
-              <a:gd name="adj" fmla="val 3333"/>
+              <a:gd name="adj" fmla="val 3125"/>
             </a:avLst>
           </a:prstGeom>
           <a:solidFill>
@@ -5309,14 +4987,14 @@
       </p:sp>
       <p:sp>
         <p:nvSpPr>
-          <p:cNvPr id="16" name="Text 13"/>
-          <p:cNvSpPr/>
-          <p:nvPr/>
-        </p:nvSpPr>
-        <p:spPr>
-          <a:xfrm>
-            <a:off x="8778240" y="3968496"/>
-            <a:ext cx="2523744" cy="237744"/>
+          <p:cNvPr id="14" name="Text 11"/>
+          <p:cNvSpPr/>
+          <p:nvPr/>
+        </p:nvSpPr>
+        <p:spPr>
+          <a:xfrm>
+            <a:off x="8796528" y="4005072"/>
+            <a:ext cx="2487168" cy="256032"/>
           </a:xfrm>
           <a:prstGeom prst="rect">
             <a:avLst/>
@@ -5332,7 +5010,7 @@
               <a:buNone/>
             </a:pPr>
             <a:r>
-              <a:rPr lang="en-US" sz="1150" b="1" dirty="0">
+              <a:rPr lang="en-US" sz="1400" b="1" dirty="0">
                 <a:solidFill>
                   <a:srgbClr val="4A5568"/>
                 </a:solidFill>
@@ -5342,20 +5020,20 @@
               </a:rPr>
               <a:t>One-shot — 1 x 5,000</a:t>
             </a:r>
-            <a:endParaRPr lang="en-US" sz="1150" dirty="0"/>
-          </a:p>
-        </p:txBody>
-      </p:sp>
-      <p:sp>
-        <p:nvSpPr>
-          <p:cNvPr id="17" name="Text 14"/>
-          <p:cNvSpPr/>
-          <p:nvPr/>
-        </p:nvSpPr>
-        <p:spPr>
-          <a:xfrm>
-            <a:off x="8778240" y="4206240"/>
-            <a:ext cx="2523744" cy="548640"/>
+            <a:endParaRPr lang="en-US" sz="1400" dirty="0"/>
+          </a:p>
+        </p:txBody>
+      </p:sp>
+      <p:sp>
+        <p:nvSpPr>
+          <p:cNvPr id="15" name="Text 12"/>
+          <p:cNvSpPr/>
+          <p:nvPr/>
+        </p:nvSpPr>
+        <p:spPr>
+          <a:xfrm>
+            <a:off x="8796528" y="4279392"/>
+            <a:ext cx="2487168" cy="718312"/>
           </a:xfrm>
           <a:prstGeom prst="rect">
             <a:avLst/>
@@ -5371,7 +5049,7 @@
               <a:buNone/>
             </a:pPr>
             <a:r>
-              <a:rPr lang="en-US" sz="3800" b="1" dirty="0">
+              <a:rPr lang="en-US" sz="4400" b="1" dirty="0">
                 <a:solidFill>
                   <a:srgbClr val="7C8797"/>
                 </a:solidFill>
@@ -5381,20 +5059,20 @@
               </a:rPr>
               <a:t>2,900</a:t>
             </a:r>
-            <a:endParaRPr lang="en-US" sz="3800" dirty="0"/>
-          </a:p>
-        </p:txBody>
-      </p:sp>
-      <p:sp>
-        <p:nvSpPr>
-          <p:cNvPr id="18" name="Text 15"/>
-          <p:cNvSpPr/>
-          <p:nvPr/>
-        </p:nvSpPr>
-        <p:spPr>
-          <a:xfrm>
-            <a:off x="8778240" y="4736592"/>
-            <a:ext cx="2523744" cy="402336"/>
+            <a:endParaRPr lang="en-US" sz="4400" dirty="0"/>
+          </a:p>
+        </p:txBody>
+      </p:sp>
+      <p:sp>
+        <p:nvSpPr>
+          <p:cNvPr id="16" name="Text 13"/>
+          <p:cNvSpPr/>
+          <p:nvPr/>
+        </p:nvSpPr>
+        <p:spPr>
+          <a:xfrm>
+            <a:off x="8796528" y="4997704"/>
+            <a:ext cx="2487168" cy="274320"/>
           </a:xfrm>
           <a:prstGeom prst="rect">
             <a:avLst/>
@@ -5410,7 +5088,7 @@
               <a:buNone/>
             </a:pPr>
             <a:r>
-              <a:rPr lang="en-US" sz="1100" dirty="0">
+              <a:rPr lang="en-US" sz="1300" dirty="0">
                 <a:solidFill>
                   <a:srgbClr val="7C8797"/>
                 </a:solidFill>
@@ -5418,22 +5096,22 @@
                 <a:ea typeface="Calibri" pitchFamily="34" charset="-122"/>
                 <a:cs typeface="Calibri" pitchFamily="34" charset="-120"/>
               </a:rPr>
-              <a:t>positives  ·  mean F1 0.6408</a:t>
-            </a:r>
-            <a:endParaRPr lang="en-US" sz="1100" dirty="0"/>
-          </a:p>
-        </p:txBody>
-      </p:sp>
-      <p:sp>
-        <p:nvSpPr>
-          <p:cNvPr id="19" name="Text 16"/>
-          <p:cNvSpPr/>
-          <p:nvPr/>
-        </p:nvSpPr>
-        <p:spPr>
-          <a:xfrm>
-            <a:off x="8549640" y="5248656"/>
-            <a:ext cx="2980944" cy="475488"/>
+              <a:t>positives  ·  F1 0.6408</a:t>
+            </a:r>
+            <a:endParaRPr lang="en-US" sz="1300" dirty="0"/>
+          </a:p>
+        </p:txBody>
+      </p:sp>
+      <p:sp>
+        <p:nvSpPr>
+          <p:cNvPr id="17" name="Text 14"/>
+          <p:cNvSpPr/>
+          <p:nvPr/>
+        </p:nvSpPr>
+        <p:spPr>
+          <a:xfrm>
+            <a:off x="8549640" y="5431536"/>
+            <a:ext cx="2980944" cy="292608"/>
           </a:xfrm>
           <a:prstGeom prst="rect">
             <a:avLst/>
@@ -5446,13 +5124,10 @@
           <a:lstStyle/>
           <a:p>
             <a:pPr indent="0" marL="0">
-              <a:lnSpc>
-                <a:spcPct val="112000"/>
-              </a:lnSpc>
               <a:buNone/>
             </a:pPr>
             <a:r>
-              <a:rPr lang="en-US" sz="1250" b="1" dirty="0">
+              <a:rPr lang="en-US" sz="1600" b="1" dirty="0">
                 <a:solidFill>
                   <a:srgbClr val="15803D"/>
                 </a:solidFill>
@@ -5460,81 +5135,74 @@
                 <a:ea typeface="Calibri" pitchFamily="34" charset="-122"/>
                 <a:cs typeface="Calibri" pitchFamily="34" charset="-120"/>
               </a:rPr>
-              <a:t>+240 positives (+8.3%)  ·  +0.0063 F1
-</a:t>
-            </a:r>
+              <a:t>+240 positives, free</a:t>
+            </a:r>
+            <a:endParaRPr lang="en-US" sz="1600" dirty="0"/>
+          </a:p>
+        </p:txBody>
+      </p:sp>
+      <p:sp>
+        <p:nvSpPr>
+          <p:cNvPr id="18" name="Shape 15"/>
+          <p:cNvSpPr/>
+          <p:nvPr/>
+        </p:nvSpPr>
+        <p:spPr>
+          <a:xfrm>
+            <a:off x="658368" y="5760720"/>
+            <a:ext cx="10872216" cy="640080"/>
+          </a:xfrm>
+          <a:prstGeom prst="roundRect">
+            <a:avLst>
+              <a:gd name="adj" fmla="val 8571"/>
+            </a:avLst>
+          </a:prstGeom>
+          <a:solidFill>
+            <a:srgbClr val="F4F6F9"/>
+          </a:solidFill>
+          <a:ln/>
+        </p:spPr>
+      </p:sp>
+      <p:sp>
+        <p:nvSpPr>
+          <p:cNvPr id="19" name="Text 16"/>
+          <p:cNvSpPr/>
+          <p:nvPr/>
+        </p:nvSpPr>
+        <p:spPr>
+          <a:xfrm>
+            <a:off x="896112" y="5760720"/>
+            <a:ext cx="10396728" cy="640080"/>
+          </a:xfrm>
+          <a:prstGeom prst="rect">
+            <a:avLst/>
+          </a:prstGeom>
+          <a:noFill/>
+          <a:ln/>
+        </p:spPr>
+        <p:txBody>
+          <a:bodyPr wrap="square" lIns="0" tIns="0" rIns="0" bIns="0" rtlCol="0" anchor="ctr"/>
+          <a:lstStyle/>
+          <a:p>
             <a:pPr indent="0" marL="0">
-              <a:lnSpc>
-                <a:spcPct val="112000"/>
-              </a:lnSpc>
               <a:buNone/>
             </a:pPr>
             <a:r>
-              <a:rPr lang="en-US" sz="1050" dirty="0">
-                <a:solidFill>
-                  <a:srgbClr val="4A5568"/>
+              <a:rPr lang="en-US" sz="1800" dirty="0">
+                <a:solidFill>
+                  <a:srgbClr val="1B2436"/>
                 </a:solidFill>
                 <a:latin typeface="Calibri" pitchFamily="34" charset="0"/>
                 <a:ea typeface="Calibri" pitchFamily="34" charset="-122"/>
                 <a:cs typeface="Calibri" pitchFamily="34" charset="-120"/>
               </a:rPr>
-              <a:t>Same budget. Only the feedback differs.</a:t>
-            </a:r>
-            <a:endParaRPr lang="en-US" sz="1250" dirty="0"/>
-          </a:p>
-        </p:txBody>
-      </p:sp>
-      <p:sp>
-        <p:nvSpPr>
-          <p:cNvPr id="20" name="Shape 17"/>
-          <p:cNvSpPr/>
-          <p:nvPr/>
-        </p:nvSpPr>
-        <p:spPr>
-          <a:xfrm>
-            <a:off x="658368" y="5760720"/>
-            <a:ext cx="10872216" cy="640080"/>
-          </a:xfrm>
-          <a:prstGeom prst="roundRect">
-            <a:avLst>
-              <a:gd name="adj" fmla="val 8571"/>
-            </a:avLst>
-          </a:prstGeom>
-          <a:solidFill>
-            <a:srgbClr val="F4F6F9"/>
-          </a:solidFill>
-          <a:ln/>
-        </p:spPr>
-      </p:sp>
-      <p:sp>
-        <p:nvSpPr>
-          <p:cNvPr id="21" name="Text 18"/>
-          <p:cNvSpPr/>
-          <p:nvPr/>
-        </p:nvSpPr>
-        <p:spPr>
-          <a:xfrm>
-            <a:off x="868680" y="5760720"/>
-            <a:ext cx="10451592" cy="640080"/>
-          </a:xfrm>
-          <a:prstGeom prst="rect">
-            <a:avLst/>
-          </a:prstGeom>
-          <a:noFill/>
-          <a:ln/>
-        </p:spPr>
-        <p:txBody>
-          <a:bodyPr wrap="square" lIns="0" tIns="0" rIns="0" bIns="0" rtlCol="0" anchor="ctr"/>
-          <a:lstStyle/>
-          <a:p>
+              <a:t>But the yield decays 79.5% → 44.3%, toward the 33% base rate. </a:t>
+            </a:r>
             <a:pPr indent="0" marL="0">
-              <a:lnSpc>
-                <a:spcPct val="112000"/>
-              </a:lnSpc>
               <a:buNone/>
             </a:pPr>
             <a:r>
-              <a:rPr lang="en-US" sz="1250" dirty="0">
+              <a:rPr lang="en-US" sz="1800" b="1" dirty="0">
                 <a:solidFill>
                   <a:srgbClr val="1B2436"/>
                 </a:solidFill>
@@ -5542,77 +5210,9 @@
                 <a:ea typeface="Calibri" pitchFamily="34" charset="-122"/>
                 <a:cs typeface="Calibri" pitchFamily="34" charset="-120"/>
               </a:rPr>
-              <a:t>The first scout sees only 500 labels, so its ranking is noisy; each round it learns from hundreds more positives and ranks better — worth </a:t>
-            </a:r>
-            <a:pPr indent="0" marL="0">
-              <a:lnSpc>
-                <a:spcPct val="112000"/>
-              </a:lnSpc>
-              <a:buNone/>
-            </a:pPr>
-            <a:r>
-              <a:rPr lang="en-US" sz="1250" b="1" dirty="0">
-                <a:solidFill>
-                  <a:srgbClr val="1B2436"/>
-                </a:solidFill>
-                <a:latin typeface="Calibri" pitchFamily="34" charset="0"/>
-                <a:ea typeface="Calibri" pitchFamily="34" charset="-122"/>
-                <a:cs typeface="Calibri" pitchFamily="34" charset="-120"/>
-              </a:rPr>
-              <a:t>+240 positives for free</a:t>
-            </a:r>
-            <a:pPr indent="0" marL="0">
-              <a:lnSpc>
-                <a:spcPct val="112000"/>
-              </a:lnSpc>
-              <a:buNone/>
-            </a:pPr>
-            <a:r>
-              <a:rPr lang="en-US" sz="1250" dirty="0">
-                <a:solidFill>
-                  <a:srgbClr val="1B2436"/>
-                </a:solidFill>
-                <a:latin typeface="Calibri" pitchFamily="34" charset="0"/>
-                <a:ea typeface="Calibri" pitchFamily="34" charset="-122"/>
-                <a:cs typeface="Calibri" pitchFamily="34" charset="-120"/>
-              </a:rPr>
-              <a:t>. But precision falling 79.5% → 44.3% is also the </a:t>
-            </a:r>
-            <a:pPr indent="0" marL="0">
-              <a:lnSpc>
-                <a:spcPct val="112000"/>
-              </a:lnSpc>
-              <a:buNone/>
-            </a:pPr>
-            <a:r>
-              <a:rPr lang="en-US" sz="1250" b="1" dirty="0">
-                <a:solidFill>
-                  <a:srgbClr val="1B2436"/>
-                </a:solidFill>
-                <a:latin typeface="Calibri" pitchFamily="34" charset="0"/>
-                <a:ea typeface="Calibri" pitchFamily="34" charset="-122"/>
-                <a:cs typeface="Calibri" pitchFamily="34" charset="-120"/>
-              </a:rPr>
-              <a:t>warning</a:t>
-            </a:r>
-            <a:pPr indent="0" marL="0">
-              <a:lnSpc>
-                <a:spcPct val="112000"/>
-              </a:lnSpc>
-              <a:buNone/>
-            </a:pPr>
-            <a:r>
-              <a:rPr lang="en-US" sz="1250" dirty="0">
-                <a:solidFill>
-                  <a:srgbClr val="1B2436"/>
-                </a:solidFill>
-                <a:latin typeface="Calibri" pitchFamily="34" charset="0"/>
-                <a:ea typeface="Calibri" pitchFamily="34" charset="-122"/>
-                <a:cs typeface="Calibri" pitchFamily="34" charset="-120"/>
-              </a:rPr>
-              <a:t>: by round 5 we are nearly guessing, which is why more budget would not save us.</a:t>
-            </a:r>
-            <a:endParaRPr lang="en-US" sz="1250" dirty="0"/>
+              <a:t>More budget would not save us.</a:t>
+            </a:r>
+            <a:endParaRPr lang="en-US" sz="1800" dirty="0"/>
           </a:p>
         </p:txBody>
       </p:sp>
@@ -5656,8 +5256,8 @@
         </p:nvSpPr>
         <p:spPr>
           <a:xfrm>
-            <a:off x="10287000" y="457200"/>
-            <a:ext cx="868680" cy="274320"/>
+            <a:off x="10204704" y="457200"/>
+            <a:ext cx="950976" cy="310896"/>
           </a:xfrm>
           <a:prstGeom prst="roundRect">
             <a:avLst>
@@ -5678,8 +5278,8 @@
         </p:nvSpPr>
         <p:spPr>
           <a:xfrm>
-            <a:off x="10287000" y="457200"/>
-            <a:ext cx="868680" cy="274320"/>
+            <a:off x="10204704" y="457200"/>
+            <a:ext cx="950976" cy="310896"/>
           </a:xfrm>
           <a:prstGeom prst="rect">
             <a:avLst/>
@@ -5695,7 +5295,7 @@
               <a:buNone/>
             </a:pPr>
             <a:r>
-              <a:rPr lang="en-US" sz="1000" b="1" spc="100" kern="0" dirty="0">
+              <a:rPr lang="en-US" sz="1200" b="1" spc="100" kern="0" dirty="0">
                 <a:solidFill>
                   <a:srgbClr val="FFFFFF"/>
                 </a:solidFill>
@@ -5705,7 +5305,7 @@
               </a:rPr>
               <a:t>LIOR</a:t>
             </a:r>
-            <a:endParaRPr lang="en-US" sz="1000" dirty="0"/>
+            <a:endParaRPr lang="en-US" sz="1200" dirty="0"/>
           </a:p>
         </p:txBody>
       </p:sp>
@@ -5717,8 +5317,8 @@
         </p:nvSpPr>
         <p:spPr>
           <a:xfrm>
-            <a:off x="11265408" y="457200"/>
-            <a:ext cx="466344" cy="274320"/>
+            <a:off x="11228832" y="457200"/>
+            <a:ext cx="502920" cy="310896"/>
           </a:xfrm>
           <a:prstGeom prst="rect">
             <a:avLst/>
@@ -5734,7 +5334,7 @@
               <a:buNone/>
             </a:pPr>
             <a:r>
-              <a:rPr lang="en-US" sz="1000" dirty="0">
+              <a:rPr lang="en-US" sz="1200" dirty="0">
                 <a:solidFill>
                   <a:srgbClr val="7C8797"/>
                 </a:solidFill>
@@ -5744,7 +5344,7 @@
               </a:rPr>
               <a:t>4 / 6</a:t>
             </a:r>
-            <a:endParaRPr lang="en-US" sz="1000" dirty="0"/>
+            <a:endParaRPr lang="en-US" sz="1200" dirty="0"/>
           </a:p>
         </p:txBody>
       </p:sp>
@@ -5756,8 +5356,8 @@
         </p:nvSpPr>
         <p:spPr>
           <a:xfrm>
-            <a:off x="658368" y="658368"/>
-            <a:ext cx="9509760" cy="685800"/>
+            <a:off x="658368" y="640080"/>
+            <a:ext cx="9509760" cy="777240"/>
           </a:xfrm>
           <a:prstGeom prst="rect">
             <a:avLst/>
@@ -5773,7 +5373,7 @@
               <a:buNone/>
             </a:pPr>
             <a:r>
-              <a:rPr lang="en-US" sz="3000" b="1" dirty="0">
+              <a:rPr lang="en-US" sz="3800" b="1" dirty="0">
                 <a:solidFill>
                   <a:srgbClr val="1B2436"/>
                 </a:solidFill>
@@ -5781,9 +5381,9 @@
                 <a:ea typeface="Cambria" pitchFamily="34" charset="-122"/>
                 <a:cs typeface="Cambria" pitchFamily="34" charset="-120"/>
               </a:rPr>
-              <a:t>The threshold is frozen — so move the data</a:t>
-            </a:r>
-            <a:endParaRPr lang="en-US" sz="3000" dirty="0"/>
+              <a:t>Frozen threshold? Move the data</a:t>
+            </a:r>
+            <a:endParaRPr lang="en-US" sz="3800" dirty="0"/>
           </a:p>
         </p:txBody>
       </p:sp>
@@ -5795,8 +5395,8 @@
         </p:nvSpPr>
         <p:spPr>
           <a:xfrm>
-            <a:off x="658368" y="1389888"/>
-            <a:ext cx="10607040" cy="457200"/>
+            <a:off x="658368" y="1481328"/>
+            <a:ext cx="10607040" cy="384048"/>
           </a:xfrm>
           <a:prstGeom prst="rect">
             <a:avLst/>
@@ -5812,7 +5412,7 @@
               <a:buNone/>
             </a:pPr>
             <a:r>
-              <a:rPr lang="en-US" sz="1400" dirty="0">
+              <a:rPr lang="en-US" sz="2000" dirty="0">
                 <a:solidFill>
                   <a:srgbClr val="4A5568"/>
                 </a:solidFill>
@@ -5820,9 +5420,9 @@
                 <a:ea typeface="Calibri" pitchFamily="34" charset="-122"/>
                 <a:cs typeface="Calibri" pitchFamily="34" charset="-120"/>
               </a:rPr>
-              <a:t>Duplicating each known positive shifts the forest’s vote share toward “Left”. It is the only recall lever we are allowed to pull.</a:t>
-            </a:r>
-            <a:endParaRPr lang="en-US" sz="1400" dirty="0"/>
+              <a:t>Duplicating positives is the only recall lever we may pull.</a:t>
+            </a:r>
+            <a:endParaRPr lang="en-US" sz="2000" dirty="0"/>
           </a:p>
         </p:txBody>
       </p:sp>
@@ -5834,8 +5434,8 @@
         </p:nvSpPr>
         <p:spPr>
           <a:xfrm>
-            <a:off x="658368" y="1920240"/>
-            <a:ext cx="7772400" cy="219456"/>
+            <a:off x="658368" y="1975104"/>
+            <a:ext cx="7863840" cy="274320"/>
           </a:xfrm>
           <a:prstGeom prst="rect">
             <a:avLst/>
@@ -5851,7 +5451,7 @@
               <a:buNone/>
             </a:pPr>
             <a:r>
-              <a:rPr lang="en-US" sz="1200" b="1" dirty="0">
+              <a:rPr lang="en-US" sz="1600" b="1" dirty="0">
                 <a:solidFill>
                   <a:srgbClr val="1B2436"/>
                 </a:solidFill>
@@ -5859,60 +5459,21 @@
                 <a:ea typeface="Calibri" pitchFamily="34" charset="-122"/>
                 <a:cs typeface="Calibri" pitchFamily="34" charset="-120"/>
               </a:rPr>
-              <a:t>Mean F1 vs positive-duplication ratio — seeds 1–3</a:t>
-            </a:r>
-            <a:endParaRPr lang="en-US" sz="1200" dirty="0"/>
-          </a:p>
-        </p:txBody>
-      </p:sp>
-      <p:sp>
-        <p:nvSpPr>
-          <p:cNvPr id="8" name="Text 6"/>
-          <p:cNvSpPr/>
-          <p:nvPr/>
-        </p:nvSpPr>
-        <p:spPr>
-          <a:xfrm>
-            <a:off x="658368" y="2121408"/>
-            <a:ext cx="7772400" cy="201168"/>
-          </a:xfrm>
-          <a:prstGeom prst="rect">
-            <a:avLst/>
-          </a:prstGeom>
-          <a:noFill/>
-          <a:ln/>
-        </p:spPr>
-        <p:txBody>
-          <a:bodyPr wrap="square" lIns="0" tIns="0" rIns="0" bIns="0" rtlCol="0" anchor="ctr"/>
-          <a:lstStyle/>
-          <a:p>
-            <a:pPr indent="0" marL="0">
-              <a:buNone/>
-            </a:pPr>
-            <a:r>
-              <a:rPr lang="en-US" sz="1050" dirty="0">
-                <a:solidFill>
-                  <a:srgbClr val="7C8797"/>
-                </a:solidFill>
-                <a:latin typeface="Calibri" pitchFamily="34" charset="0"/>
-                <a:ea typeface="Calibri" pitchFamily="34" charset="-122"/>
-                <a:cs typeface="Calibri" pitchFamily="34" charset="-120"/>
-              </a:rPr>
-              <a:t>Identical labeled set at every point; only the final training composition changes.</a:t>
-            </a:r>
-            <a:endParaRPr lang="en-US" sz="1050" dirty="0"/>
+              <a:t>Mean F1 vs positive-duplication ratio</a:t>
+            </a:r>
+            <a:endParaRPr lang="en-US" sz="1600" dirty="0"/>
           </a:p>
         </p:txBody>
       </p:sp>
       <p:graphicFrame>
         <p:nvGraphicFramePr>
-          <p:cNvPr id="9" name="Chart 0" descr=""/>
+          <p:cNvPr id="8" name="Chart 0" descr=""/>
           <p:cNvGraphicFramePr/>
           <p:nvPr/>
         </p:nvGraphicFramePr>
         <p:xfrm>
-          <a:off x="548640" y="2340864"/>
-          <a:ext cx="7863840" cy="3200400"/>
+          <a:off x="548640" y="2286000"/>
+          <a:ext cx="7863840" cy="3310128"/>
         </p:xfrm>
         <a:graphic xmlns:a="http://schemas.openxmlformats.org/drawingml/2006/main">
           <a:graphicData uri="http://schemas.openxmlformats.org/drawingml/2006/chart">
@@ -5922,18 +5483,57 @@
       </p:graphicFrame>
       <p:sp>
         <p:nvSpPr>
+          <p:cNvPr id="9" name="Text 6"/>
+          <p:cNvSpPr/>
+          <p:nvPr/>
+        </p:nvSpPr>
+        <p:spPr>
+          <a:xfrm>
+            <a:off x="658368" y="5486400"/>
+            <a:ext cx="7863840" cy="274320"/>
+          </a:xfrm>
+          <a:prstGeom prst="rect">
+            <a:avLst/>
+          </a:prstGeom>
+          <a:noFill/>
+          <a:ln/>
+        </p:spPr>
+        <p:txBody>
+          <a:bodyPr wrap="square" lIns="0" tIns="0" rIns="0" bIns="0" rtlCol="0" anchor="ctr"/>
+          <a:lstStyle/>
+          <a:p>
+            <a:pPr indent="0" marL="0">
+              <a:buNone/>
+            </a:pPr>
+            <a:r>
+              <a:rPr lang="en-US" sz="1300" dirty="0">
+                <a:solidFill>
+                  <a:srgbClr val="7C8797"/>
+                </a:solidFill>
+                <a:latin typeface="Calibri" pitchFamily="34" charset="0"/>
+                <a:ea typeface="Calibri" pitchFamily="34" charset="-122"/>
+                <a:cs typeface="Calibri" pitchFamily="34" charset="-120"/>
+              </a:rPr>
+              <a:t>Copies of each known positive in the final training set</a:t>
+            </a:r>
+            <a:endParaRPr lang="en-US" sz="1300" dirty="0"/>
+          </a:p>
+        </p:txBody>
+      </p:sp>
+      <p:sp>
+        <p:nvSpPr>
           <p:cNvPr id="10" name="Shape 7"/>
           <p:cNvSpPr/>
           <p:nvPr/>
         </p:nvSpPr>
         <p:spPr>
           <a:xfrm>
-            <a:off x="8641080" y="2340864"/>
-            <a:ext cx="2889504" cy="1481328"/>
+            <a:off x="8641080" y="2286000"/>
+            <a:ext cx="2889504" cy="1463040"/>
           </a:xfrm>
           <a:prstGeom prst="roundRect">
             <a:avLst>
-              <a:gd name="adj" fmla="val 3086"/>
+              <a:gd name="adj" fmla="val 3125"/>
             </a:avLst>
           </a:prstGeom>
           <a:solidFill>
@@ -5950,8 +5550,8 @@
         </p:nvSpPr>
         <p:spPr>
           <a:xfrm>
-            <a:off x="8869680" y="2505456"/>
-            <a:ext cx="2432304" cy="548640"/>
+            <a:off x="8796528" y="2505456"/>
+            <a:ext cx="2651760" cy="656336"/>
           </a:xfrm>
           <a:prstGeom prst="rect">
             <a:avLst/>
@@ -5967,7 +5567,7 @@
               <a:buNone/>
             </a:pPr>
             <a:r>
-              <a:rPr lang="en-US" sz="3800" b="1" dirty="0">
+              <a:rPr lang="en-US" sz="4000" b="1" dirty="0">
                 <a:solidFill>
                   <a:srgbClr val="B45309"/>
                 </a:solidFill>
@@ -5977,7 +5577,7 @@
               </a:rPr>
               <a:t>+0.0178</a:t>
             </a:r>
-            <a:endParaRPr lang="en-US" sz="3800" dirty="0"/>
+            <a:endParaRPr lang="en-US" sz="4000" dirty="0"/>
           </a:p>
         </p:txBody>
       </p:sp>
@@ -5989,8 +5589,8 @@
         </p:nvSpPr>
         <p:spPr>
           <a:xfrm>
-            <a:off x="8869680" y="3035808"/>
-            <a:ext cx="2432304" cy="475488"/>
+            <a:off x="8796528" y="3161792"/>
+            <a:ext cx="2651760" cy="274320"/>
           </a:xfrm>
           <a:prstGeom prst="rect">
             <a:avLst/>
@@ -6006,7 +5606,7 @@
               <a:buNone/>
             </a:pPr>
             <a:r>
-              <a:rPr lang="en-US" sz="1100" dirty="0">
+              <a:rPr lang="en-US" sz="1300" dirty="0">
                 <a:solidFill>
                   <a:srgbClr val="7C8797"/>
                 </a:solidFill>
@@ -6014,22 +5614,44 @@
                 <a:ea typeface="Calibri" pitchFamily="34" charset="-122"/>
                 <a:cs typeface="Calibri" pitchFamily="34" charset="-120"/>
               </a:rPr>
-              <a:t>1x → 2x — the biggest single win in the project</a:t>
-            </a:r>
-            <a:endParaRPr lang="en-US" sz="1100" dirty="0"/>
-          </a:p>
-        </p:txBody>
-      </p:sp>
-      <p:sp>
-        <p:nvSpPr>
-          <p:cNvPr id="13" name="Text 10"/>
-          <p:cNvSpPr/>
-          <p:nvPr/>
-        </p:nvSpPr>
-        <p:spPr>
-          <a:xfrm>
-            <a:off x="8641080" y="4023360"/>
-            <a:ext cx="2889504" cy="1417320"/>
+              <a:t>1x → 2x — our biggest win</a:t>
+            </a:r>
+            <a:endParaRPr lang="en-US" sz="1300" dirty="0"/>
+          </a:p>
+        </p:txBody>
+      </p:sp>
+      <p:sp>
+        <p:nvSpPr>
+          <p:cNvPr id="13" name="Shape 10"/>
+          <p:cNvSpPr/>
+          <p:nvPr/>
+        </p:nvSpPr>
+        <p:spPr>
+          <a:xfrm>
+            <a:off x="8641080" y="3877056"/>
+            <a:ext cx="2889504" cy="1554480"/>
+          </a:xfrm>
+          <a:prstGeom prst="roundRect">
+            <a:avLst>
+              <a:gd name="adj" fmla="val 2941"/>
+            </a:avLst>
+          </a:prstGeom>
+          <a:solidFill>
+            <a:srgbClr val="F4F6F9"/>
+          </a:solidFill>
+          <a:ln/>
+        </p:spPr>
+      </p:sp>
+      <p:sp>
+        <p:nvSpPr>
+          <p:cNvPr id="14" name="Text 11"/>
+          <p:cNvSpPr/>
+          <p:nvPr/>
+        </p:nvSpPr>
+        <p:spPr>
+          <a:xfrm>
+            <a:off x="8796528" y="4114800"/>
+            <a:ext cx="2651760" cy="656336"/>
           </a:xfrm>
           <a:prstGeom prst="rect">
             <a:avLst/>
@@ -6042,54 +5664,133 @@
           <a:lstStyle/>
           <a:p>
             <a:pPr indent="0" marL="0">
-              <a:lnSpc>
-                <a:spcPct val="118000"/>
-              </a:lnSpc>
               <a:buNone/>
             </a:pPr>
             <a:r>
-              <a:rPr lang="en-US" sz="1300" b="1" dirty="0">
-                <a:solidFill>
-                  <a:srgbClr val="1B2436"/>
+              <a:rPr lang="en-US" sz="4000" b="1" dirty="0">
+                <a:solidFill>
+                  <a:srgbClr val="7C8797"/>
+                </a:solidFill>
+                <a:latin typeface="Cambria" pitchFamily="34" charset="0"/>
+                <a:ea typeface="Cambria" pitchFamily="34" charset="-122"/>
+                <a:cs typeface="Cambria" pitchFamily="34" charset="-120"/>
+              </a:rPr>
+              <a:t>0.0006</a:t>
+            </a:r>
+            <a:endParaRPr lang="en-US" sz="4000" dirty="0"/>
+          </a:p>
+        </p:txBody>
+      </p:sp>
+      <p:sp>
+        <p:nvSpPr>
+          <p:cNvPr id="15" name="Text 12"/>
+          <p:cNvSpPr/>
+          <p:nvPr/>
+        </p:nvSpPr>
+        <p:spPr>
+          <a:xfrm>
+            <a:off x="8796528" y="4771136"/>
+            <a:ext cx="2651760" cy="274320"/>
+          </a:xfrm>
+          <a:prstGeom prst="rect">
+            <a:avLst/>
+          </a:prstGeom>
+          <a:noFill/>
+          <a:ln/>
+        </p:spPr>
+        <p:txBody>
+          <a:bodyPr wrap="square" lIns="0" tIns="0" rIns="0" bIns="0" rtlCol="0" anchor="ctr"/>
+          <a:lstStyle/>
+          <a:p>
+            <a:pPr indent="0" marL="0">
+              <a:buNone/>
+            </a:pPr>
+            <a:r>
+              <a:rPr lang="en-US" sz="1300" dirty="0">
+                <a:solidFill>
+                  <a:srgbClr val="7C8797"/>
                 </a:solidFill>
                 <a:latin typeface="Calibri" pitchFamily="34" charset="0"/>
                 <a:ea typeface="Calibri" pitchFamily="34" charset="-122"/>
                 <a:cs typeface="Calibri" pitchFamily="34" charset="-120"/>
               </a:rPr>
-              <a:t>…but 2x vs 3x = 0.0006
-</a:t>
-            </a:r>
+              <a:t>2x vs 3x — the gap</a:t>
+            </a:r>
+            <a:endParaRPr lang="en-US" sz="1300" dirty="0"/>
+          </a:p>
+        </p:txBody>
+      </p:sp>
+      <p:sp>
+        <p:nvSpPr>
+          <p:cNvPr id="16" name="Text 13"/>
+          <p:cNvSpPr/>
+          <p:nvPr/>
+        </p:nvSpPr>
+        <p:spPr>
+          <a:xfrm>
+            <a:off x="8796528" y="5084064"/>
+            <a:ext cx="2651760" cy="274320"/>
+          </a:xfrm>
+          <a:prstGeom prst="rect">
+            <a:avLst/>
+          </a:prstGeom>
+          <a:noFill/>
+          <a:ln/>
+        </p:spPr>
+        <p:txBody>
+          <a:bodyPr wrap="square" lIns="0" tIns="0" rIns="0" bIns="0" rtlCol="0" anchor="ctr"/>
+          <a:lstStyle/>
+          <a:p>
             <a:pPr indent="0" marL="0">
-              <a:lnSpc>
-                <a:spcPct val="118000"/>
-              </a:lnSpc>
               <a:buNone/>
             </a:pPr>
             <a:r>
-              <a:rPr lang="en-US" sz="1150" dirty="0">
-                <a:solidFill>
-                  <a:srgbClr val="4A5568"/>
+              <a:rPr lang="en-US" sz="1400" b="1" dirty="0">
+                <a:solidFill>
+                  <a:srgbClr val="1B2436"/>
                 </a:solidFill>
                 <a:latin typeface="Calibri" pitchFamily="34" charset="0"/>
                 <a:ea typeface="Calibri" pitchFamily="34" charset="-122"/>
                 <a:cs typeface="Calibri" pitchFamily="34" charset="-120"/>
               </a:rPr>
-              <a:t>Our noise floor is ±0.005, from training row order alone. The dip at 2.25–2.5x is larger than the gap between the two best points. That is a noise pattern, not a peak.</a:t>
-            </a:r>
-            <a:endParaRPr lang="en-US" sz="1300" dirty="0"/>
-          </a:p>
-        </p:txBody>
-      </p:sp>
-      <p:sp>
-        <p:nvSpPr>
-          <p:cNvPr id="14" name="Text 11"/>
-          <p:cNvSpPr/>
-          <p:nvPr/>
-        </p:nvSpPr>
-        <p:spPr>
-          <a:xfrm>
-            <a:off x="8641080" y="5486400"/>
-            <a:ext cx="2889504" cy="219456"/>
+              <a:t>inside our ±0.005 noise floor</a:t>
+            </a:r>
+            <a:endParaRPr lang="en-US" sz="1400" dirty="0"/>
+          </a:p>
+        </p:txBody>
+      </p:sp>
+      <p:sp>
+        <p:nvSpPr>
+          <p:cNvPr id="17" name="Shape 14"/>
+          <p:cNvSpPr/>
+          <p:nvPr/>
+        </p:nvSpPr>
+        <p:spPr>
+          <a:xfrm>
+            <a:off x="658368" y="5760720"/>
+            <a:ext cx="10872216" cy="640080"/>
+          </a:xfrm>
+          <a:prstGeom prst="roundRect">
+            <a:avLst>
+              <a:gd name="adj" fmla="val 8571"/>
+            </a:avLst>
+          </a:prstGeom>
+          <a:solidFill>
+            <a:srgbClr val="F4F6F9"/>
+          </a:solidFill>
+          <a:ln/>
+        </p:spPr>
+      </p:sp>
+      <p:sp>
+        <p:nvSpPr>
+          <p:cNvPr id="18" name="Text 15"/>
+          <p:cNvSpPr/>
+          <p:nvPr/>
+        </p:nvSpPr>
+        <p:spPr>
+          <a:xfrm>
+            <a:off x="896112" y="5760720"/>
+            <a:ext cx="10396728" cy="640080"/>
           </a:xfrm>
           <a:prstGeom prst="rect">
             <a:avLst/>
@@ -6105,71 +5806,21 @@
               <a:buNone/>
             </a:pPr>
             <a:r>
-              <a:rPr lang="en-US" sz="1050" dirty="0">
-                <a:solidFill>
-                  <a:srgbClr val="7C8797"/>
+              <a:rPr lang="en-US" sz="1800" dirty="0">
+                <a:solidFill>
+                  <a:srgbClr val="1B2436"/>
                 </a:solidFill>
                 <a:latin typeface="Calibri" pitchFamily="34" charset="0"/>
                 <a:ea typeface="Calibri" pitchFamily="34" charset="-122"/>
                 <a:cs typeface="Calibri" pitchFamily="34" charset="-120"/>
               </a:rPr>
-              <a:t>At 2x — precision 0.584  ·  recall 0.725</a:t>
-            </a:r>
-            <a:endParaRPr lang="en-US" sz="1050" dirty="0"/>
-          </a:p>
-        </p:txBody>
-      </p:sp>
-      <p:sp>
-        <p:nvSpPr>
-          <p:cNvPr id="15" name="Shape 12"/>
-          <p:cNvSpPr/>
-          <p:nvPr/>
-        </p:nvSpPr>
-        <p:spPr>
-          <a:xfrm>
-            <a:off x="658368" y="5760720"/>
-            <a:ext cx="10872216" cy="640080"/>
-          </a:xfrm>
-          <a:prstGeom prst="roundRect">
-            <a:avLst>
-              <a:gd name="adj" fmla="val 8571"/>
-            </a:avLst>
-          </a:prstGeom>
-          <a:solidFill>
-            <a:srgbClr val="F4F6F9"/>
-          </a:solidFill>
-          <a:ln/>
-        </p:spPr>
-      </p:sp>
-      <p:sp>
-        <p:nvSpPr>
-          <p:cNvPr id="16" name="Text 13"/>
-          <p:cNvSpPr/>
-          <p:nvPr/>
-        </p:nvSpPr>
-        <p:spPr>
-          <a:xfrm>
-            <a:off x="868680" y="5760720"/>
-            <a:ext cx="10451592" cy="640080"/>
-          </a:xfrm>
-          <a:prstGeom prst="rect">
-            <a:avLst/>
-          </a:prstGeom>
-          <a:noFill/>
-          <a:ln/>
-        </p:spPr>
-        <p:txBody>
-          <a:bodyPr wrap="square" lIns="0" tIns="0" rIns="0" bIns="0" rtlCol="0" anchor="ctr"/>
-          <a:lstStyle/>
-          <a:p>
+              <a:t>Duplication matters. </a:t>
+            </a:r>
             <a:pPr indent="0" marL="0">
-              <a:lnSpc>
-                <a:spcPct val="112000"/>
-              </a:lnSpc>
               <a:buNone/>
             </a:pPr>
             <a:r>
-              <a:rPr lang="en-US" sz="1250" b="1" dirty="0">
+              <a:rPr lang="en-US" sz="1800" b="1" dirty="0">
                 <a:solidFill>
                   <a:srgbClr val="1B2436"/>
                 </a:solidFill>
@@ -6177,60 +5828,9 @@
                 <a:ea typeface="Calibri" pitchFamily="34" charset="-122"/>
                 <a:cs typeface="Calibri" pitchFamily="34" charset="-120"/>
               </a:rPr>
-              <a:t>Honest reading: </a:t>
-            </a:r>
-            <a:pPr indent="0" marL="0">
-              <a:lnSpc>
-                <a:spcPct val="112000"/>
-              </a:lnSpc>
-              <a:buNone/>
-            </a:pPr>
-            <a:r>
-              <a:rPr lang="en-US" sz="1250" dirty="0">
-                <a:solidFill>
-                  <a:srgbClr val="1B2436"/>
-                </a:solidFill>
-                <a:latin typeface="Calibri" pitchFamily="34" charset="0"/>
-                <a:ea typeface="Calibri" pitchFamily="34" charset="-122"/>
-                <a:cs typeface="Calibri" pitchFamily="34" charset="-120"/>
-              </a:rPr>
-              <a:t>the 1x → 2x jump (+0.0178) is 3½× the noise floor — real. But 2x and 3x differ by 0.0006, so we claim only what the data supports: </a:t>
-            </a:r>
-            <a:pPr indent="0" marL="0">
-              <a:lnSpc>
-                <a:spcPct val="112000"/>
-              </a:lnSpc>
-              <a:buNone/>
-            </a:pPr>
-            <a:r>
-              <a:rPr lang="en-US" sz="1250" b="1" i="1" dirty="0">
-                <a:solidFill>
-                  <a:srgbClr val="1B2436"/>
-                </a:solidFill>
-                <a:latin typeface="Calibri" pitchFamily="34" charset="0"/>
-                <a:ea typeface="Calibri" pitchFamily="34" charset="-122"/>
-                <a:cs typeface="Calibri" pitchFamily="34" charset="-120"/>
-              </a:rPr>
-              <a:t>duplication matters; the exact ratio in [2, 3] does not.</a:t>
-            </a:r>
-            <a:pPr indent="0" marL="0">
-              <a:lnSpc>
-                <a:spcPct val="112000"/>
-              </a:lnSpc>
-              <a:buNone/>
-            </a:pPr>
-            <a:r>
-              <a:rPr lang="en-US" sz="1250" dirty="0">
-                <a:solidFill>
-                  <a:srgbClr val="1B2436"/>
-                </a:solidFill>
-                <a:latin typeface="Calibri" pitchFamily="34" charset="0"/>
-                <a:ea typeface="Calibri" pitchFamily="34" charset="-122"/>
-                <a:cs typeface="Calibri" pitchFamily="34" charset="-120"/>
-              </a:rPr>
-              <a:t> We picked 2x as the flat, robust centre — not because 0.6471 “won”.</a:t>
-            </a:r>
-            <a:endParaRPr lang="en-US" sz="1250" dirty="0"/>
+              <a:t>The exact ratio in [2, 3] does not — that gap is noise.</a:t>
+            </a:r>
+            <a:endParaRPr lang="en-US" sz="1800" dirty="0"/>
           </a:p>
         </p:txBody>
       </p:sp>
@@ -6274,8 +5874,8 @@
         </p:nvSpPr>
         <p:spPr>
           <a:xfrm>
-            <a:off x="10287000" y="457200"/>
-            <a:ext cx="868680" cy="274320"/>
+            <a:off x="10204704" y="457200"/>
+            <a:ext cx="950976" cy="310896"/>
           </a:xfrm>
           <a:prstGeom prst="roundRect">
             <a:avLst>
@@ -6296,8 +5896,8 @@
         </p:nvSpPr>
         <p:spPr>
           <a:xfrm>
-            <a:off x="10287000" y="457200"/>
-            <a:ext cx="868680" cy="274320"/>
+            <a:off x="10204704" y="457200"/>
+            <a:ext cx="950976" cy="310896"/>
           </a:xfrm>
           <a:prstGeom prst="rect">
             <a:avLst/>
@@ -6313,7 +5913,7 @@
               <a:buNone/>
             </a:pPr>
             <a:r>
-              <a:rPr lang="en-US" sz="1000" b="1" spc="100" kern="0" dirty="0">
+              <a:rPr lang="en-US" sz="1200" b="1" spc="100" kern="0" dirty="0">
                 <a:solidFill>
                   <a:srgbClr val="FFFFFF"/>
                 </a:solidFill>
@@ -6323,7 +5923,7 @@
               </a:rPr>
               <a:t>RAZ</a:t>
             </a:r>
-            <a:endParaRPr lang="en-US" sz="1000" dirty="0"/>
+            <a:endParaRPr lang="en-US" sz="1200" dirty="0"/>
           </a:p>
         </p:txBody>
       </p:sp>
@@ -6335,8 +5935,8 @@
         </p:nvSpPr>
         <p:spPr>
           <a:xfrm>
-            <a:off x="11265408" y="457200"/>
-            <a:ext cx="466344" cy="274320"/>
+            <a:off x="11228832" y="457200"/>
+            <a:ext cx="502920" cy="310896"/>
           </a:xfrm>
           <a:prstGeom prst="rect">
             <a:avLst/>
@@ -6352,7 +5952,7 @@
               <a:buNone/>
             </a:pPr>
             <a:r>
-              <a:rPr lang="en-US" sz="1000" dirty="0">
+              <a:rPr lang="en-US" sz="1200" dirty="0">
                 <a:solidFill>
                   <a:srgbClr val="7C8797"/>
                 </a:solidFill>
@@ -6362,7 +5962,7 @@
               </a:rPr>
               <a:t>5 / 6</a:t>
             </a:r>
-            <a:endParaRPr lang="en-US" sz="1000" dirty="0"/>
+            <a:endParaRPr lang="en-US" sz="1200" dirty="0"/>
           </a:p>
         </p:txBody>
       </p:sp>
@@ -6374,8 +5974,8 @@
         </p:nvSpPr>
         <p:spPr>
           <a:xfrm>
-            <a:off x="658368" y="658368"/>
-            <a:ext cx="9509760" cy="685800"/>
+            <a:off x="658368" y="640080"/>
+            <a:ext cx="9509760" cy="777240"/>
           </a:xfrm>
           <a:prstGeom prst="rect">
             <a:avLst/>
@@ -6391,7 +5991,7 @@
               <a:buNone/>
             </a:pPr>
             <a:r>
-              <a:rPr lang="en-US" sz="3000" b="1" dirty="0">
+              <a:rPr lang="en-US" sz="3800" b="1" dirty="0">
                 <a:solidFill>
                   <a:srgbClr val="1B2436"/>
                 </a:solidFill>
@@ -6399,9 +5999,9 @@
                 <a:ea typeface="Cambria" pitchFamily="34" charset="-122"/>
                 <a:cs typeface="Cambria" pitchFamily="34" charset="-120"/>
               </a:rPr>
-              <a:t>32 configurations tried. None survived.</a:t>
-            </a:r>
-            <a:endParaRPr lang="en-US" sz="3000" dirty="0"/>
+              <a:t>32 configurations. None survived.</a:t>
+            </a:r>
+            <a:endParaRPr lang="en-US" sz="3800" dirty="0"/>
           </a:p>
         </p:txBody>
       </p:sp>
@@ -6413,8 +6013,8 @@
         </p:nvSpPr>
         <p:spPr>
           <a:xfrm>
-            <a:off x="658368" y="1389888"/>
-            <a:ext cx="10607040" cy="457200"/>
+            <a:off x="658368" y="1481328"/>
+            <a:ext cx="10607040" cy="384048"/>
           </a:xfrm>
           <a:prstGeom prst="rect">
             <a:avLst/>
@@ -6430,7 +6030,7 @@
               <a:buNone/>
             </a:pPr>
             <a:r>
-              <a:rPr lang="en-US" sz="1400" dirty="0">
+              <a:rPr lang="en-US" sz="2000" dirty="0">
                 <a:solidFill>
                   <a:srgbClr val="4A5568"/>
                 </a:solidFill>
@@ -6438,9 +6038,9 @@
                 <a:ea typeface="Calibri" pitchFamily="34" charset="-122"/>
                 <a:cs typeface="Calibri" pitchFamily="34" charset="-120"/>
               </a:rPr>
-              <a:t>We pre-declared a +0.005 acceptance threshold — the measured noise floor — and held every idea to it. That is why strategy.py is still the simple one.</a:t>
-            </a:r>
-            <a:endParaRPr lang="en-US" sz="1400" dirty="0"/>
+              <a:t>Pre-declared bar: +0.005 — our measured noise floor.</a:t>
+            </a:r>
+            <a:endParaRPr lang="en-US" sz="2000" dirty="0"/>
           </a:p>
         </p:txBody>
       </p:sp>
@@ -6452,8 +6052,8 @@
         </p:nvSpPr>
         <p:spPr>
           <a:xfrm>
-            <a:off x="658368" y="1920240"/>
-            <a:ext cx="7223760" cy="219456"/>
+            <a:off x="658368" y="1975104"/>
+            <a:ext cx="7223760" cy="274320"/>
           </a:xfrm>
           <a:prstGeom prst="rect">
             <a:avLst/>
@@ -6469,7 +6069,7 @@
               <a:buNone/>
             </a:pPr>
             <a:r>
-              <a:rPr lang="en-US" sz="1200" b="1" dirty="0">
+              <a:rPr lang="en-US" sz="1600" b="1" dirty="0">
                 <a:solidFill>
                   <a:srgbClr val="1B2436"/>
                 </a:solidFill>
@@ -6477,60 +6077,21 @@
                 <a:ea typeface="Calibri" pitchFamily="34" charset="-122"/>
                 <a:cs typeface="Calibri" pitchFamily="34" charset="-120"/>
               </a:rPr>
-              <a:t>Change in mean F1 vs our 0.6471 — every idea we tested</a:t>
-            </a:r>
-            <a:endParaRPr lang="en-US" sz="1200" dirty="0"/>
-          </a:p>
-        </p:txBody>
-      </p:sp>
-      <p:sp>
-        <p:nvSpPr>
-          <p:cNvPr id="8" name="Text 6"/>
-          <p:cNvSpPr/>
-          <p:nvPr/>
-        </p:nvSpPr>
-        <p:spPr>
-          <a:xfrm>
-            <a:off x="658368" y="2121408"/>
-            <a:ext cx="7223760" cy="201168"/>
-          </a:xfrm>
-          <a:prstGeom prst="rect">
-            <a:avLst/>
-          </a:prstGeom>
-          <a:noFill/>
-          <a:ln/>
-        </p:spPr>
-        <p:txBody>
-          <a:bodyPr wrap="square" lIns="0" tIns="0" rIns="0" bIns="0" rtlCol="0" anchor="ctr"/>
-          <a:lstStyle/>
-          <a:p>
-            <a:pPr indent="0" marL="0">
-              <a:buNone/>
-            </a:pPr>
-            <a:r>
-              <a:rPr lang="en-US" sz="1050" dirty="0">
-                <a:solidFill>
-                  <a:srgbClr val="7C8797"/>
-                </a:solidFill>
-                <a:latin typeface="Calibri" pitchFamily="34" charset="0"/>
-                <a:ea typeface="Calibri" pitchFamily="34" charset="-122"/>
-                <a:cs typeface="Calibri" pitchFamily="34" charset="-120"/>
-              </a:rPr>
-              <a:t>Bars right of zero beat us; only one does, and by less than the noise floor.</a:t>
-            </a:r>
-            <a:endParaRPr lang="en-US" sz="1050" dirty="0"/>
+              <a:t>Change in mean F1 vs our 0.6471</a:t>
+            </a:r>
+            <a:endParaRPr lang="en-US" sz="1600" dirty="0"/>
           </a:p>
         </p:txBody>
       </p:sp>
       <p:graphicFrame>
         <p:nvGraphicFramePr>
-          <p:cNvPr id="9" name="Chart 0" descr=""/>
+          <p:cNvPr id="8" name="Chart 0" descr=""/>
           <p:cNvGraphicFramePr/>
           <p:nvPr/>
         </p:nvGraphicFramePr>
         <p:xfrm>
-          <a:off x="548640" y="2340864"/>
-          <a:ext cx="7315200" cy="3291840"/>
+          <a:off x="548640" y="2286000"/>
+          <a:ext cx="7315200" cy="3566160"/>
         </p:xfrm>
         <a:graphic xmlns:a="http://schemas.openxmlformats.org/drawingml/2006/main">
           <a:graphicData uri="http://schemas.openxmlformats.org/drawingml/2006/chart">
@@ -6540,18 +6101,18 @@
       </p:graphicFrame>
       <p:sp>
         <p:nvSpPr>
-          <p:cNvPr id="10" name="Shape 7"/>
-          <p:cNvSpPr/>
-          <p:nvPr/>
-        </p:nvSpPr>
-        <p:spPr>
-          <a:xfrm>
-            <a:off x="8092440" y="2340864"/>
-            <a:ext cx="3438144" cy="1737360"/>
+          <p:cNvPr id="9" name="Shape 6"/>
+          <p:cNvSpPr/>
+          <p:nvPr/>
+        </p:nvSpPr>
+        <p:spPr>
+          <a:xfrm>
+            <a:off x="8092440" y="2286000"/>
+            <a:ext cx="3438144" cy="2048256"/>
           </a:xfrm>
           <a:prstGeom prst="roundRect">
             <a:avLst>
-              <a:gd name="adj" fmla="val 2632"/>
+              <a:gd name="adj" fmla="val 2232"/>
             </a:avLst>
           </a:prstGeom>
           <a:solidFill>
@@ -6562,14 +6123,14 @@
       </p:sp>
       <p:sp>
         <p:nvSpPr>
-          <p:cNvPr id="11" name="Text 8"/>
-          <p:cNvSpPr/>
-          <p:nvPr/>
-        </p:nvSpPr>
-        <p:spPr>
-          <a:xfrm>
-            <a:off x="8321040" y="2505456"/>
-            <a:ext cx="2980944" cy="237744"/>
+          <p:cNvPr id="10" name="Text 7"/>
+          <p:cNvSpPr/>
+          <p:nvPr/>
+        </p:nvSpPr>
+        <p:spPr>
+          <a:xfrm>
+            <a:off x="8366760" y="2468880"/>
+            <a:ext cx="2926080" cy="274320"/>
           </a:xfrm>
           <a:prstGeom prst="rect">
             <a:avLst/>
@@ -6585,7 +6146,7 @@
               <a:buNone/>
             </a:pPr>
             <a:r>
-              <a:rPr lang="en-US" sz="1000" b="1" spc="80" kern="0" dirty="0">
+              <a:rPr lang="en-US" sz="1300" b="1" spc="80" kern="0" dirty="0">
                 <a:solidFill>
                   <a:srgbClr val="B45309"/>
                 </a:solidFill>
@@ -6593,159 +6154,22 @@
                 <a:ea typeface="Calibri" pitchFamily="34" charset="-122"/>
                 <a:cs typeface="Calibri" pitchFamily="34" charset="-120"/>
               </a:rPr>
-              <a:t>WHY THE BEST “WINNER” WAS REJECTED</a:t>
-            </a:r>
-            <a:endParaRPr lang="en-US" sz="1000" dirty="0"/>
-          </a:p>
-        </p:txBody>
-      </p:sp>
-      <p:sp>
-        <p:nvSpPr>
-          <p:cNvPr id="12" name="Text 9"/>
-          <p:cNvSpPr/>
-          <p:nvPr/>
-        </p:nvSpPr>
-        <p:spPr>
-          <a:xfrm>
-            <a:off x="8321040" y="2779776"/>
-            <a:ext cx="2980944" cy="1188720"/>
-          </a:xfrm>
-          <a:prstGeom prst="rect">
-            <a:avLst/>
-          </a:prstGeom>
-          <a:noFill/>
-          <a:ln/>
-        </p:spPr>
-        <p:txBody>
-          <a:bodyPr wrap="square" lIns="0" tIns="0" rIns="0" bIns="0" rtlCol="0" anchor="ctr"/>
-          <a:lstStyle/>
-          <a:p>
-            <a:pPr indent="0" marL="0">
-              <a:lnSpc>
-                <a:spcPct val="118000"/>
-              </a:lnSpc>
-              <a:buNone/>
-            </a:pPr>
-            <a:r>
-              <a:rPr lang="en-US" sz="1200" dirty="0">
-                <a:solidFill>
-                  <a:srgbClr val="1B2436"/>
-                </a:solidFill>
-                <a:latin typeface="Calibri" pitchFamily="34" charset="0"/>
-                <a:ea typeface="Calibri" pitchFamily="34" charset="-122"/>
-                <a:cs typeface="Calibri" pitchFamily="34" charset="-120"/>
-              </a:rPr>
-              <a:t>Tiered oversampling gained +0.0010 — one-fifth of the noise floor — and it </a:t>
-            </a:r>
-            <a:pPr indent="0" marL="0">
-              <a:lnSpc>
-                <a:spcPct val="118000"/>
-              </a:lnSpc>
-              <a:buNone/>
-            </a:pPr>
-            <a:r>
-              <a:rPr lang="en-US" sz="1200" b="1" dirty="0">
-                <a:solidFill>
-                  <a:srgbClr val="1B2436"/>
-                </a:solidFill>
-                <a:latin typeface="Calibri" pitchFamily="34" charset="0"/>
-                <a:ea typeface="Calibri" pitchFamily="34" charset="-122"/>
-                <a:cs typeface="Calibri" pitchFamily="34" charset="-120"/>
-              </a:rPr>
-              <a:t>hurt seed 1</a:t>
-            </a:r>
-            <a:pPr indent="0" marL="0">
-              <a:lnSpc>
-                <a:spcPct val="118000"/>
-              </a:lnSpc>
-              <a:buNone/>
-            </a:pPr>
-            <a:r>
-              <a:rPr lang="en-US" sz="1200" dirty="0">
-                <a:solidFill>
-                  <a:srgbClr val="1B2436"/>
-                </a:solidFill>
-                <a:latin typeface="Calibri" pitchFamily="34" charset="0"/>
-                <a:ea typeface="Calibri" pitchFamily="34" charset="-122"/>
-                <a:cs typeface="Calibri" pitchFamily="34" charset="-120"/>
-              </a:rPr>
-              <a:t>. Adopting it would be fitting our own test set, not improving the method.</a:t>
-            </a:r>
-            <a:endParaRPr lang="en-US" sz="1200" dirty="0"/>
-          </a:p>
-        </p:txBody>
-      </p:sp>
-      <p:sp>
-        <p:nvSpPr>
-          <p:cNvPr id="13" name="Shape 10"/>
-          <p:cNvSpPr/>
-          <p:nvPr/>
-        </p:nvSpPr>
-        <p:spPr>
-          <a:xfrm>
-            <a:off x="8092440" y="4206240"/>
-            <a:ext cx="3438144" cy="2194560"/>
-          </a:xfrm>
-          <a:prstGeom prst="roundRect">
-            <a:avLst>
-              <a:gd name="adj" fmla="val 2083"/>
-            </a:avLst>
-          </a:prstGeom>
-          <a:solidFill>
-            <a:srgbClr val="F4F6F9"/>
-          </a:solidFill>
-          <a:ln/>
-        </p:spPr>
-      </p:sp>
-      <p:sp>
-        <p:nvSpPr>
-          <p:cNvPr id="14" name="Text 11"/>
-          <p:cNvSpPr/>
-          <p:nvPr/>
-        </p:nvSpPr>
-        <p:spPr>
-          <a:xfrm>
-            <a:off x="8321040" y="4370832"/>
-            <a:ext cx="2980944" cy="237744"/>
-          </a:xfrm>
-          <a:prstGeom prst="rect">
-            <a:avLst/>
-          </a:prstGeom>
-          <a:noFill/>
-          <a:ln/>
-        </p:spPr>
-        <p:txBody>
-          <a:bodyPr wrap="square" lIns="0" tIns="0" rIns="0" bIns="0" rtlCol="0" anchor="ctr"/>
-          <a:lstStyle/>
-          <a:p>
-            <a:pPr indent="0" marL="0">
-              <a:buNone/>
-            </a:pPr>
-            <a:r>
-              <a:rPr lang="en-US" sz="1000" b="1" spc="80" kern="0" dirty="0">
-                <a:solidFill>
-                  <a:srgbClr val="B45309"/>
-                </a:solidFill>
-                <a:latin typeface="Calibri" pitchFamily="34" charset="0"/>
-                <a:ea typeface="Calibri" pitchFamily="34" charset="-122"/>
-                <a:cs typeface="Calibri" pitchFamily="34" charset="-120"/>
-              </a:rPr>
-              <a:t>TWO RESULTS THAT SURPRISED US</a:t>
-            </a:r>
-            <a:endParaRPr lang="en-US" sz="1000" dirty="0"/>
-          </a:p>
-        </p:txBody>
-      </p:sp>
-      <p:sp>
-        <p:nvSpPr>
-          <p:cNvPr id="15" name="Text 12"/>
-          <p:cNvSpPr/>
-          <p:nvPr/>
-        </p:nvSpPr>
-        <p:spPr>
-          <a:xfrm>
-            <a:off x="8321040" y="4645152"/>
-            <a:ext cx="2980944" cy="1645920"/>
+              <a:t>THE “WINNER” WE REJECTED</a:t>
+            </a:r>
+            <a:endParaRPr lang="en-US" sz="1300" dirty="0"/>
+          </a:p>
+        </p:txBody>
+      </p:sp>
+      <p:sp>
+        <p:nvSpPr>
+          <p:cNvPr id="11" name="Text 8"/>
+          <p:cNvSpPr/>
+          <p:nvPr/>
+        </p:nvSpPr>
+        <p:spPr>
+          <a:xfrm>
+            <a:off x="8366760" y="2816352"/>
+            <a:ext cx="2926080" cy="749808"/>
           </a:xfrm>
           <a:prstGeom prst="rect">
             <a:avLst/>
@@ -6764,7 +6188,7 @@
               <a:buNone/>
             </a:pPr>
             <a:r>
-              <a:rPr lang="en-US" sz="1100" b="1" dirty="0">
+              <a:rPr lang="en-US" sz="2200" b="1" dirty="0">
                 <a:solidFill>
                   <a:srgbClr val="1B2436"/>
                 </a:solidFill>
@@ -6772,8 +6196,33 @@
                 <a:ea typeface="Calibri" pitchFamily="34" charset="-122"/>
                 <a:cs typeface="Calibri" pitchFamily="34" charset="-120"/>
               </a:rPr>
-              <a:t>Query-by-committee ≡ probability. </a:t>
-            </a:r>
+              <a:t>+0.0010 — and it hurt seed 1.</a:t>
+            </a:r>
+            <a:endParaRPr lang="en-US" sz="2200" dirty="0"/>
+          </a:p>
+        </p:txBody>
+      </p:sp>
+      <p:sp>
+        <p:nvSpPr>
+          <p:cNvPr id="12" name="Text 9"/>
+          <p:cNvSpPr/>
+          <p:nvPr/>
+        </p:nvSpPr>
+        <p:spPr>
+          <a:xfrm>
+            <a:off x="8366760" y="3584448"/>
+            <a:ext cx="2926080" cy="713232"/>
+          </a:xfrm>
+          <a:prstGeom prst="rect">
+            <a:avLst/>
+          </a:prstGeom>
+          <a:noFill/>
+          <a:ln/>
+        </p:spPr>
+        <p:txBody>
+          <a:bodyPr wrap="square" lIns="0" tIns="0" rIns="0" bIns="0" rtlCol="0" anchor="ctr"/>
+          <a:lstStyle/>
+          <a:p>
             <a:pPr indent="0" marL="0">
               <a:lnSpc>
                 <a:spcPct val="114000"/>
@@ -6781,7 +6230,7 @@
               <a:buNone/>
             </a:pPr>
             <a:r>
-              <a:rPr lang="en-US" sz="1100" dirty="0">
+              <a:rPr lang="en-US" sz="1400" dirty="0">
                 <a:solidFill>
                   <a:srgbClr val="4A5568"/>
                 </a:solidFill>
@@ -6789,9 +6238,94 @@
                 <a:ea typeface="Calibri" pitchFamily="34" charset="-122"/>
                 <a:cs typeface="Calibri" pitchFamily="34" charset="-120"/>
               </a:rPr>
-              <a:t>A forest already is a committee — predict_proba is the tree vote share. Identical ranking, zero gain.
-</a:t>
-            </a:r>
+              <a:t>One-fifth of the noise floor. Adopting it fits our test set, not the problem.</a:t>
+            </a:r>
+            <a:endParaRPr lang="en-US" sz="1400" dirty="0"/>
+          </a:p>
+        </p:txBody>
+      </p:sp>
+      <p:sp>
+        <p:nvSpPr>
+          <p:cNvPr id="13" name="Shape 10"/>
+          <p:cNvSpPr/>
+          <p:nvPr/>
+        </p:nvSpPr>
+        <p:spPr>
+          <a:xfrm>
+            <a:off x="8092440" y="4480560"/>
+            <a:ext cx="3438144" cy="1517904"/>
+          </a:xfrm>
+          <a:prstGeom prst="roundRect">
+            <a:avLst>
+              <a:gd name="adj" fmla="val 3012"/>
+            </a:avLst>
+          </a:prstGeom>
+          <a:solidFill>
+            <a:srgbClr val="F4F6F9"/>
+          </a:solidFill>
+          <a:ln/>
+        </p:spPr>
+      </p:sp>
+      <p:sp>
+        <p:nvSpPr>
+          <p:cNvPr id="14" name="Text 11"/>
+          <p:cNvSpPr/>
+          <p:nvPr/>
+        </p:nvSpPr>
+        <p:spPr>
+          <a:xfrm>
+            <a:off x="8366760" y="4626864"/>
+            <a:ext cx="2926080" cy="274320"/>
+          </a:xfrm>
+          <a:prstGeom prst="rect">
+            <a:avLst/>
+          </a:prstGeom>
+          <a:noFill/>
+          <a:ln/>
+        </p:spPr>
+        <p:txBody>
+          <a:bodyPr wrap="square" lIns="0" tIns="0" rIns="0" bIns="0" rtlCol="0" anchor="ctr"/>
+          <a:lstStyle/>
+          <a:p>
+            <a:pPr indent="0" marL="0">
+              <a:buNone/>
+            </a:pPr>
+            <a:r>
+              <a:rPr lang="en-US" sz="1300" b="1" spc="80" kern="0" dirty="0">
+                <a:solidFill>
+                  <a:srgbClr val="B45309"/>
+                </a:solidFill>
+                <a:latin typeface="Calibri" pitchFamily="34" charset="0"/>
+                <a:ea typeface="Calibri" pitchFamily="34" charset="-122"/>
+                <a:cs typeface="Calibri" pitchFamily="34" charset="-120"/>
+              </a:rPr>
+              <a:t>THE SURPRISE</a:t>
+            </a:r>
+            <a:endParaRPr lang="en-US" sz="1300" dirty="0"/>
+          </a:p>
+        </p:txBody>
+      </p:sp>
+      <p:sp>
+        <p:nvSpPr>
+          <p:cNvPr id="15" name="Text 12"/>
+          <p:cNvSpPr/>
+          <p:nvPr/>
+        </p:nvSpPr>
+        <p:spPr>
+          <a:xfrm>
+            <a:off x="8366760" y="4937760"/>
+            <a:ext cx="2926080" cy="566928"/>
+          </a:xfrm>
+          <a:prstGeom prst="rect">
+            <a:avLst/>
+          </a:prstGeom>
+          <a:noFill/>
+          <a:ln/>
+        </p:spPr>
+        <p:txBody>
+          <a:bodyPr wrap="square" lIns="0" tIns="0" rIns="0" bIns="0" rtlCol="0" anchor="ctr"/>
+          <a:lstStyle/>
+          <a:p>
             <a:pPr indent="0" marL="0">
               <a:lnSpc>
                 <a:spcPct val="114000"/>
@@ -6799,7 +6333,7 @@
               <a:buNone/>
             </a:pPr>
             <a:r>
-              <a:rPr lang="en-US" sz="1100" b="1" dirty="0">
+              <a:rPr lang="en-US" sz="1800" b="1" dirty="0">
                 <a:solidFill>
                   <a:srgbClr val="1B2436"/>
                 </a:solidFill>
@@ -6807,16 +6341,38 @@
                 <a:ea typeface="Calibri" pitchFamily="34" charset="-122"/>
                 <a:cs typeface="Calibri" pitchFamily="34" charset="-120"/>
               </a:rPr>
-              <a:t>Dropping hard negatives backfired </a:t>
-            </a:r>
+              <a:t>Query-by-committee ≡ probability.</a:t>
+            </a:r>
+            <a:endParaRPr lang="en-US" sz="1800" dirty="0"/>
+          </a:p>
+        </p:txBody>
+      </p:sp>
+      <p:sp>
+        <p:nvSpPr>
+          <p:cNvPr id="16" name="Text 13"/>
+          <p:cNvSpPr/>
+          <p:nvPr/>
+        </p:nvSpPr>
+        <p:spPr>
+          <a:xfrm>
+            <a:off x="8366760" y="5541264"/>
+            <a:ext cx="2926080" cy="310896"/>
+          </a:xfrm>
+          <a:prstGeom prst="rect">
+            <a:avLst/>
+          </a:prstGeom>
+          <a:noFill/>
+          <a:ln/>
+        </p:spPr>
+        <p:txBody>
+          <a:bodyPr wrap="square" lIns="0" tIns="0" rIns="0" bIns="0" rtlCol="0" anchor="ctr"/>
+          <a:lstStyle/>
+          <a:p>
             <a:pPr indent="0" marL="0">
-              <a:lnSpc>
-                <a:spcPct val="114000"/>
-              </a:lnSpc>
               <a:buNone/>
             </a:pPr>
             <a:r>
-              <a:rPr lang="en-US" sz="1100" dirty="0">
+              <a:rPr lang="en-US" sz="1400" dirty="0">
                 <a:solidFill>
                   <a:srgbClr val="4A5568"/>
                 </a:solidFill>
@@ -6824,22 +6380,22 @@
                 <a:ea typeface="Calibri" pitchFamily="34" charset="-122"/>
                 <a:cs typeface="Calibri" pitchFamily="34" charset="-120"/>
               </a:rPr>
-              <a:t>(0.647 → 0.627). Our labeled set is already 60% positive; those boundary negatives are the only thing teaching precision.</a:t>
-            </a:r>
-            <a:endParaRPr lang="en-US" sz="1100" dirty="0"/>
-          </a:p>
-        </p:txBody>
-      </p:sp>
-      <p:sp>
-        <p:nvSpPr>
-          <p:cNvPr id="16" name="Text 13"/>
-          <p:cNvSpPr/>
-          <p:nvPr/>
-        </p:nvSpPr>
-        <p:spPr>
-          <a:xfrm>
-            <a:off x="658368" y="5870448"/>
-            <a:ext cx="7223760" cy="512064"/>
+              <a:t>A forest already is a committee.</a:t>
+            </a:r>
+            <a:endParaRPr lang="en-US" sz="1400" dirty="0"/>
+          </a:p>
+        </p:txBody>
+      </p:sp>
+      <p:sp>
+        <p:nvSpPr>
+          <p:cNvPr id="17" name="Text 14"/>
+          <p:cNvSpPr/>
+          <p:nvPr/>
+        </p:nvSpPr>
+        <p:spPr>
+          <a:xfrm>
+            <a:off x="658368" y="6053328"/>
+            <a:ext cx="7223760" cy="310896"/>
           </a:xfrm>
           <a:prstGeom prst="rect">
             <a:avLst/>
@@ -6852,13 +6408,10 @@
           <a:lstStyle/>
           <a:p>
             <a:pPr indent="0" marL="0">
-              <a:lnSpc>
-                <a:spcPct val="114000"/>
-              </a:lnSpc>
               <a:buNone/>
             </a:pPr>
             <a:r>
-              <a:rPr lang="en-US" sz="1100" i="1" dirty="0">
+              <a:rPr lang="en-US" sz="1300" i="1" dirty="0">
                 <a:solidFill>
                   <a:srgbClr val="7C8797"/>
                 </a:solidFill>
@@ -6866,9 +6419,9 @@
                 <a:ea typeface="Calibri" pitchFamily="34" charset="-122"/>
                 <a:cs typeface="Calibri" pitchFamily="34" charset="-120"/>
               </a:rPr>
-              <a:t>Where the ceiling comes from: round-5 precision is 44%, closing on the 33% base rate. The ~1,800 positives we never catch look like “Stayed” to this forest — not our algorithm, the features.</a:t>
-            </a:r>
-            <a:endParaRPr lang="en-US" sz="1100" dirty="0"/>
+              <a:t>Ceiling: round-5 precision 44% ≈ the 33% base rate. Not our algorithm — the features.</a:t>
+            </a:r>
+            <a:endParaRPr lang="en-US" sz="1300" dirty="0"/>
           </a:p>
         </p:txBody>
       </p:sp>
@@ -6912,8 +6465,8 @@
         </p:nvSpPr>
         <p:spPr>
           <a:xfrm>
-            <a:off x="10287000" y="457200"/>
-            <a:ext cx="868680" cy="274320"/>
+            <a:off x="10204704" y="457200"/>
+            <a:ext cx="950976" cy="310896"/>
           </a:xfrm>
           <a:prstGeom prst="roundRect">
             <a:avLst>
@@ -6934,8 +6487,8 @@
         </p:nvSpPr>
         <p:spPr>
           <a:xfrm>
-            <a:off x="10287000" y="457200"/>
-            <a:ext cx="868680" cy="274320"/>
+            <a:off x="10204704" y="457200"/>
+            <a:ext cx="950976" cy="310896"/>
           </a:xfrm>
           <a:prstGeom prst="rect">
             <a:avLst/>
@@ -6951,7 +6504,7 @@
               <a:buNone/>
             </a:pPr>
             <a:r>
-              <a:rPr lang="en-US" sz="1000" b="1" spc="100" kern="0" dirty="0">
+              <a:rPr lang="en-US" sz="1200" b="1" spc="100" kern="0" dirty="0">
                 <a:solidFill>
                   <a:srgbClr val="14213D"/>
                 </a:solidFill>
@@ -6961,7 +6514,7 @@
               </a:rPr>
               <a:t>LIOR</a:t>
             </a:r>
-            <a:endParaRPr lang="en-US" sz="1000" dirty="0"/>
+            <a:endParaRPr lang="en-US" sz="1200" dirty="0"/>
           </a:p>
         </p:txBody>
       </p:sp>
@@ -6973,8 +6526,8 @@
         </p:nvSpPr>
         <p:spPr>
           <a:xfrm>
-            <a:off x="11265408" y="457200"/>
-            <a:ext cx="466344" cy="274320"/>
+            <a:off x="11228832" y="457200"/>
+            <a:ext cx="502920" cy="310896"/>
           </a:xfrm>
           <a:prstGeom prst="rect">
             <a:avLst/>
@@ -6990,7 +6543,7 @@
               <a:buNone/>
             </a:pPr>
             <a:r>
-              <a:rPr lang="en-US" sz="1000" dirty="0">
+              <a:rPr lang="en-US" sz="1200" dirty="0">
                 <a:solidFill>
                   <a:srgbClr val="8E9CB8"/>
                 </a:solidFill>
@@ -7000,7 +6553,7 @@
               </a:rPr>
               <a:t>6 / 6</a:t>
             </a:r>
-            <a:endParaRPr lang="en-US" sz="1000" dirty="0"/>
+            <a:endParaRPr lang="en-US" sz="1200" dirty="0"/>
           </a:p>
         </p:txBody>
       </p:sp>
@@ -7012,8 +6565,8 @@
         </p:nvSpPr>
         <p:spPr>
           <a:xfrm>
-            <a:off x="658368" y="658368"/>
-            <a:ext cx="9509760" cy="685800"/>
+            <a:off x="658368" y="640080"/>
+            <a:ext cx="9509760" cy="777240"/>
           </a:xfrm>
           <a:prstGeom prst="rect">
             <a:avLst/>
@@ -7029,7 +6582,7 @@
               <a:buNone/>
             </a:pPr>
             <a:r>
-              <a:rPr lang="en-US" sz="3000" b="1" dirty="0">
+              <a:rPr lang="en-US" sz="3800" b="1" dirty="0">
                 <a:solidFill>
                   <a:srgbClr val="FFFFFF"/>
                 </a:solidFill>
@@ -7039,7 +6592,7 @@
               </a:rPr>
               <a:t>Result</a:t>
             </a:r>
-            <a:endParaRPr lang="en-US" sz="3000" dirty="0"/>
+            <a:endParaRPr lang="en-US" sz="3800" dirty="0"/>
           </a:p>
         </p:txBody>
       </p:sp>
@@ -7051,8 +6604,8 @@
         </p:nvSpPr>
         <p:spPr>
           <a:xfrm>
-            <a:off x="658368" y="1417320"/>
-            <a:ext cx="4572000" cy="1234440"/>
+            <a:off x="658368" y="1481328"/>
+            <a:ext cx="4937760" cy="1325880"/>
           </a:xfrm>
           <a:prstGeom prst="rect">
             <a:avLst/>
@@ -7068,7 +6621,7 @@
               <a:buNone/>
             </a:pPr>
             <a:r>
-              <a:rPr lang="en-US" sz="7200" b="1" dirty="0">
+              <a:rPr lang="en-US" sz="8000" b="1" dirty="0">
                 <a:solidFill>
                   <a:srgbClr val="E3A140"/>
                 </a:solidFill>
@@ -7078,7 +6631,7 @@
               </a:rPr>
               <a:t>0.6471</a:t>
             </a:r>
-            <a:endParaRPr lang="en-US" sz="7200" dirty="0"/>
+            <a:endParaRPr lang="en-US" sz="8000" dirty="0"/>
           </a:p>
         </p:txBody>
       </p:sp>
@@ -7090,8 +6643,8 @@
         </p:nvSpPr>
         <p:spPr>
           <a:xfrm>
-            <a:off x="658368" y="2670048"/>
-            <a:ext cx="4572000" cy="310896"/>
+            <a:off x="658368" y="2816352"/>
+            <a:ext cx="4937760" cy="365760"/>
           </a:xfrm>
           <a:prstGeom prst="rect">
             <a:avLst/>
@@ -7107,7 +6660,7 @@
               <a:buNone/>
             </a:pPr>
             <a:r>
-              <a:rPr lang="en-US" sz="1350" dirty="0">
+              <a:rPr lang="en-US" sz="1800" dirty="0">
                 <a:solidFill>
                   <a:srgbClr val="C3CEE4"/>
                 </a:solidFill>
@@ -7115,9 +6668,9 @@
                 <a:ea typeface="Calibri" pitchFamily="34" charset="-122"/>
                 <a:cs typeface="Calibri" pitchFamily="34" charset="-120"/>
               </a:rPr>
-              <a:t>mean F1 (“Left”)  ·  over seeds 1, 2, 3</a:t>
-            </a:r>
-            <a:endParaRPr lang="en-US" sz="1350" dirty="0"/>
+              <a:t>mean F1 (“Left”)  ·  seeds 1, 2, 3</a:t>
+            </a:r>
+            <a:endParaRPr lang="en-US" sz="1800" dirty="0"/>
           </a:p>
         </p:txBody>
       </p:sp>
@@ -7136,21 +6689,21 @@
           </p:nvPr>
         </p:nvGraphicFramePr>
         <p:xfrm>
-          <a:off x="658368" y="3108960"/>
-          <a:ext cx="5760720" cy="914400"/>
+          <a:off x="658368" y="3346704"/>
+          <a:ext cx="6035040" cy="914400"/>
         </p:xfrm>
         <a:graphic>
           <a:graphicData uri="http://schemas.openxmlformats.org/drawingml/2006/table">
             <a:tbl>
               <a:tblPr/>
               <a:tblGrid>
-                <a:gridCol w="822960"/>
-                <a:gridCol w="1188720"/>
-                <a:gridCol w="1371600"/>
+                <a:gridCol w="914400"/>
+                <a:gridCol w="1280160"/>
+                <a:gridCol w="1463040"/>
                 <a:gridCol w="1188720"/>
                 <a:gridCol w="1188720"/>
               </a:tblGrid>
-              <a:tr h="347472">
+              <a:tr h="420624">
                 <a:tc>
                   <a:txBody>
                     <a:bodyPr/>
@@ -7160,7 +6713,7 @@
                         <a:buNone/>
                       </a:pPr>
                       <a:r>
-                        <a:rPr lang="en-US" sz="1100" b="1" dirty="0">
+                        <a:rPr lang="en-US" sz="1300" b="1" dirty="0">
                           <a:solidFill>
                             <a:srgbClr val="8E9CB8"/>
                           </a:solidFill>
@@ -7170,7 +6723,7 @@
                         </a:rPr>
                         <a:t>Seed</a:t>
                       </a:r>
-                      <a:endParaRPr lang="en-US" sz="1100" dirty="0">
+                      <a:endParaRPr lang="en-US" sz="1300" dirty="0">
                         <a:latin typeface="Calibri" charset="0"/>
                         <a:ea typeface="Calibri" charset="0"/>
                         <a:cs typeface="Calibri" charset="0"/>
@@ -7228,7 +6781,7 @@
                         <a:buNone/>
                       </a:pPr>
                       <a:r>
-                        <a:rPr lang="en-US" sz="1100" b="1" dirty="0">
+                        <a:rPr lang="en-US" sz="1300" b="1" dirty="0">
                           <a:solidFill>
                             <a:srgbClr val="8E9CB8"/>
                           </a:solidFill>
@@ -7238,7 +6791,7 @@
                         </a:rPr>
                         <a:t>F1</a:t>
                       </a:r>
-                      <a:endParaRPr lang="en-US" sz="1100" dirty="0">
+                      <a:endParaRPr lang="en-US" sz="1300" dirty="0">
                         <a:latin typeface="Calibri" charset="0"/>
                         <a:ea typeface="Calibri" charset="0"/>
                         <a:cs typeface="Calibri" charset="0"/>
@@ -7296,7 +6849,7 @@
                         <a:buNone/>
                       </a:pPr>
                       <a:r>
-                        <a:rPr lang="en-US" sz="1100" b="1" dirty="0">
+                        <a:rPr lang="en-US" sz="1300" b="1" dirty="0">
                           <a:solidFill>
                             <a:srgbClr val="8E9CB8"/>
                           </a:solidFill>
@@ -7306,7 +6859,7 @@
                         </a:rPr>
                         <a:t>Precision</a:t>
                       </a:r>
-                      <a:endParaRPr lang="en-US" sz="1100" dirty="0">
+                      <a:endParaRPr lang="en-US" sz="1300" dirty="0">
                         <a:latin typeface="Calibri" charset="0"/>
                         <a:ea typeface="Calibri" charset="0"/>
                         <a:cs typeface="Calibri" charset="0"/>
@@ -7364,7 +6917,7 @@
                         <a:buNone/>
                       </a:pPr>
                       <a:r>
-                        <a:rPr lang="en-US" sz="1100" b="1" dirty="0">
+                        <a:rPr lang="en-US" sz="1300" b="1" dirty="0">
                           <a:solidFill>
                             <a:srgbClr val="8E9CB8"/>
                           </a:solidFill>
@@ -7374,7 +6927,7 @@
                         </a:rPr>
                         <a:t>Recall</a:t>
                       </a:r>
-                      <a:endParaRPr lang="en-US" sz="1100" dirty="0">
+                      <a:endParaRPr lang="en-US" sz="1300" dirty="0">
                         <a:latin typeface="Calibri" charset="0"/>
                         <a:ea typeface="Calibri" charset="0"/>
                         <a:cs typeface="Calibri" charset="0"/>
@@ -7432,7 +6985,7 @@
                         <a:buNone/>
                       </a:pPr>
                       <a:r>
-                        <a:rPr lang="en-US" sz="1100" b="1" dirty="0">
+                        <a:rPr lang="en-US" sz="1300" b="1" dirty="0">
                           <a:solidFill>
                             <a:srgbClr val="8E9CB8"/>
                           </a:solidFill>
@@ -7442,7 +6995,7 @@
                         </a:rPr>
                         <a:t>Runtime</a:t>
                       </a:r>
-                      <a:endParaRPr lang="en-US" sz="1100" dirty="0">
+                      <a:endParaRPr lang="en-US" sz="1300" dirty="0">
                         <a:latin typeface="Calibri" charset="0"/>
                         <a:ea typeface="Calibri" charset="0"/>
                         <a:cs typeface="Calibri" charset="0"/>
@@ -7492,7 +7045,7 @@
                   </a:tcPr>
                 </a:tc>
               </a:tr>
-              <a:tr h="347472">
+              <a:tr h="420624">
                 <a:tc>
                   <a:txBody>
                     <a:bodyPr/>
@@ -7502,7 +7055,7 @@
                         <a:buNone/>
                       </a:pPr>
                       <a:r>
-                        <a:rPr lang="en-US" sz="1250" dirty="0">
+                        <a:rPr lang="en-US" sz="1600" dirty="0">
                           <a:solidFill>
                             <a:srgbClr val="FFFFFF"/>
                           </a:solidFill>
@@ -7512,7 +7065,7 @@
                         </a:rPr>
                         <a:t>1</a:t>
                       </a:r>
-                      <a:endParaRPr lang="en-US" sz="1250" dirty="0">
+                      <a:endParaRPr lang="en-US" sz="1600" dirty="0">
                         <a:latin typeface="Calibri" charset="0"/>
                         <a:ea typeface="Calibri" charset="0"/>
                         <a:cs typeface="Calibri" charset="0"/>
@@ -7570,7 +7123,7 @@
                         <a:buNone/>
                       </a:pPr>
                       <a:r>
-                        <a:rPr lang="en-US" sz="1250" dirty="0">
+                        <a:rPr lang="en-US" sz="1600" dirty="0">
                           <a:solidFill>
                             <a:srgbClr val="FFFFFF"/>
                           </a:solidFill>
@@ -7580,7 +7133,7 @@
                         </a:rPr>
                         <a:t>0.6381</a:t>
                       </a:r>
-                      <a:endParaRPr lang="en-US" sz="1250" dirty="0">
+                      <a:endParaRPr lang="en-US" sz="1600" dirty="0">
                         <a:latin typeface="Calibri" charset="0"/>
                         <a:ea typeface="Calibri" charset="0"/>
                         <a:cs typeface="Calibri" charset="0"/>
@@ -7638,7 +7191,7 @@
                         <a:buNone/>
                       </a:pPr>
                       <a:r>
-                        <a:rPr lang="en-US" sz="1250" dirty="0">
+                        <a:rPr lang="en-US" sz="1600" dirty="0">
                           <a:solidFill>
                             <a:srgbClr val="FFFFFF"/>
                           </a:solidFill>
@@ -7648,7 +7201,7 @@
                         </a:rPr>
                         <a:t>0.573</a:t>
                       </a:r>
-                      <a:endParaRPr lang="en-US" sz="1250" dirty="0">
+                      <a:endParaRPr lang="en-US" sz="1600" dirty="0">
                         <a:latin typeface="Calibri" charset="0"/>
                         <a:ea typeface="Calibri" charset="0"/>
                         <a:cs typeface="Calibri" charset="0"/>
@@ -7706,7 +7259,7 @@
                         <a:buNone/>
                       </a:pPr>
                       <a:r>
-                        <a:rPr lang="en-US" sz="1250" dirty="0">
+                        <a:rPr lang="en-US" sz="1600" dirty="0">
                           <a:solidFill>
                             <a:srgbClr val="FFFFFF"/>
                           </a:solidFill>
@@ -7716,7 +7269,7 @@
                         </a:rPr>
                         <a:t>0.720</a:t>
                       </a:r>
-                      <a:endParaRPr lang="en-US" sz="1250" dirty="0">
+                      <a:endParaRPr lang="en-US" sz="1600" dirty="0">
                         <a:latin typeface="Calibri" charset="0"/>
                         <a:ea typeface="Calibri" charset="0"/>
                         <a:cs typeface="Calibri" charset="0"/>
@@ -7774,7 +7327,7 @@
                         <a:buNone/>
                       </a:pPr>
                       <a:r>
-                        <a:rPr lang="en-US" sz="1250" dirty="0">
+                        <a:rPr lang="en-US" sz="1600" dirty="0">
                           <a:solidFill>
                             <a:srgbClr val="FFFFFF"/>
                           </a:solidFill>
@@ -7784,7 +7337,7 @@
                         </a:rPr>
                         <a:t>19.3 s</a:t>
                       </a:r>
-                      <a:endParaRPr lang="en-US" sz="1250" dirty="0">
+                      <a:endParaRPr lang="en-US" sz="1600" dirty="0">
                         <a:latin typeface="Calibri" charset="0"/>
                         <a:ea typeface="Calibri" charset="0"/>
                         <a:cs typeface="Calibri" charset="0"/>
@@ -7834,7 +7387,7 @@
                   </a:tcPr>
                 </a:tc>
               </a:tr>
-              <a:tr h="347472">
+              <a:tr h="420624">
                 <a:tc>
                   <a:txBody>
                     <a:bodyPr/>
@@ -7844,7 +7397,7 @@
                         <a:buNone/>
                       </a:pPr>
                       <a:r>
-                        <a:rPr lang="en-US" sz="1250" dirty="0">
+                        <a:rPr lang="en-US" sz="1600" dirty="0">
                           <a:solidFill>
                             <a:srgbClr val="FFFFFF"/>
                           </a:solidFill>
@@ -7854,7 +7407,7 @@
                         </a:rPr>
                         <a:t>2</a:t>
                       </a:r>
-                      <a:endParaRPr lang="en-US" sz="1250" dirty="0">
+                      <a:endParaRPr lang="en-US" sz="1600" dirty="0">
                         <a:latin typeface="Calibri" charset="0"/>
                         <a:ea typeface="Calibri" charset="0"/>
                         <a:cs typeface="Calibri" charset="0"/>
@@ -7912,7 +7465,7 @@
                         <a:buNone/>
                       </a:pPr>
                       <a:r>
-                        <a:rPr lang="en-US" sz="1250" dirty="0">
+                        <a:rPr lang="en-US" sz="1600" dirty="0">
                           <a:solidFill>
                             <a:srgbClr val="FFFFFF"/>
                           </a:solidFill>
@@ -7922,7 +7475,7 @@
                         </a:rPr>
                         <a:t>0.6491</a:t>
                       </a:r>
-                      <a:endParaRPr lang="en-US" sz="1250" dirty="0">
+                      <a:endParaRPr lang="en-US" sz="1600" dirty="0">
                         <a:latin typeface="Calibri" charset="0"/>
                         <a:ea typeface="Calibri" charset="0"/>
                         <a:cs typeface="Calibri" charset="0"/>
@@ -7980,7 +7533,7 @@
                         <a:buNone/>
                       </a:pPr>
                       <a:r>
-                        <a:rPr lang="en-US" sz="1250" dirty="0">
+                        <a:rPr lang="en-US" sz="1600" dirty="0">
                           <a:solidFill>
                             <a:srgbClr val="FFFFFF"/>
                           </a:solidFill>
@@ -7990,7 +7543,7 @@
                         </a:rPr>
                         <a:t>0.588</a:t>
                       </a:r>
-                      <a:endParaRPr lang="en-US" sz="1250" dirty="0">
+                      <a:endParaRPr lang="en-US" sz="1600" dirty="0">
                         <a:latin typeface="Calibri" charset="0"/>
                         <a:ea typeface="Calibri" charset="0"/>
                         <a:cs typeface="Calibri" charset="0"/>
@@ -8048,7 +7601,7 @@
                         <a:buNone/>
                       </a:pPr>
                       <a:r>
-                        <a:rPr lang="en-US" sz="1250" dirty="0">
+                        <a:rPr lang="en-US" sz="1600" dirty="0">
                           <a:solidFill>
                             <a:srgbClr val="FFFFFF"/>
                           </a:solidFill>
@@ -8058,7 +7611,7 @@
                         </a:rPr>
                         <a:t>0.725</a:t>
                       </a:r>
-                      <a:endParaRPr lang="en-US" sz="1250" dirty="0">
+                      <a:endParaRPr lang="en-US" sz="1600" dirty="0">
                         <a:latin typeface="Calibri" charset="0"/>
                         <a:ea typeface="Calibri" charset="0"/>
                         <a:cs typeface="Calibri" charset="0"/>
@@ -8116,7 +7669,7 @@
                         <a:buNone/>
                       </a:pPr>
                       <a:r>
-                        <a:rPr lang="en-US" sz="1250" dirty="0">
+                        <a:rPr lang="en-US" sz="1600" dirty="0">
                           <a:solidFill>
                             <a:srgbClr val="FFFFFF"/>
                           </a:solidFill>
@@ -8126,7 +7679,7 @@
                         </a:rPr>
                         <a:t>31.3 s</a:t>
                       </a:r>
-                      <a:endParaRPr lang="en-US" sz="1250" dirty="0">
+                      <a:endParaRPr lang="en-US" sz="1600" dirty="0">
                         <a:latin typeface="Calibri" charset="0"/>
                         <a:ea typeface="Calibri" charset="0"/>
                         <a:cs typeface="Calibri" charset="0"/>
@@ -8176,7 +7729,7 @@
                   </a:tcPr>
                 </a:tc>
               </a:tr>
-              <a:tr h="347472">
+              <a:tr h="420624">
                 <a:tc>
                   <a:txBody>
                     <a:bodyPr/>
@@ -8186,7 +7739,7 @@
                         <a:buNone/>
                       </a:pPr>
                       <a:r>
-                        <a:rPr lang="en-US" sz="1250" dirty="0">
+                        <a:rPr lang="en-US" sz="1600" dirty="0">
                           <a:solidFill>
                             <a:srgbClr val="FFFFFF"/>
                           </a:solidFill>
@@ -8196,7 +7749,7 @@
                         </a:rPr>
                         <a:t>3</a:t>
                       </a:r>
-                      <a:endParaRPr lang="en-US" sz="1250" dirty="0">
+                      <a:endParaRPr lang="en-US" sz="1600" dirty="0">
                         <a:latin typeface="Calibri" charset="0"/>
                         <a:ea typeface="Calibri" charset="0"/>
                         <a:cs typeface="Calibri" charset="0"/>
@@ -8254,7 +7807,7 @@
                         <a:buNone/>
                       </a:pPr>
                       <a:r>
-                        <a:rPr lang="en-US" sz="1250" dirty="0">
+                        <a:rPr lang="en-US" sz="1600" dirty="0">
                           <a:solidFill>
                             <a:srgbClr val="FFFFFF"/>
                           </a:solidFill>
@@ -8264,7 +7817,7 @@
                         </a:rPr>
                         <a:t>0.6539</a:t>
                       </a:r>
-                      <a:endParaRPr lang="en-US" sz="1250" dirty="0">
+                      <a:endParaRPr lang="en-US" sz="1600" dirty="0">
                         <a:latin typeface="Calibri" charset="0"/>
                         <a:ea typeface="Calibri" charset="0"/>
                         <a:cs typeface="Calibri" charset="0"/>
@@ -8322,7 +7875,7 @@
                         <a:buNone/>
                       </a:pPr>
                       <a:r>
-                        <a:rPr lang="en-US" sz="1250" dirty="0">
+                        <a:rPr lang="en-US" sz="1600" dirty="0">
                           <a:solidFill>
                             <a:srgbClr val="FFFFFF"/>
                           </a:solidFill>
@@ -8332,7 +7885,7 @@
                         </a:rPr>
                         <a:t>0.592</a:t>
                       </a:r>
-                      <a:endParaRPr lang="en-US" sz="1250" dirty="0">
+                      <a:endParaRPr lang="en-US" sz="1600" dirty="0">
                         <a:latin typeface="Calibri" charset="0"/>
                         <a:ea typeface="Calibri" charset="0"/>
                         <a:cs typeface="Calibri" charset="0"/>
@@ -8390,7 +7943,7 @@
                         <a:buNone/>
                       </a:pPr>
                       <a:r>
-                        <a:rPr lang="en-US" sz="1250" dirty="0">
+                        <a:rPr lang="en-US" sz="1600" dirty="0">
                           <a:solidFill>
                             <a:srgbClr val="FFFFFF"/>
                           </a:solidFill>
@@ -8400,7 +7953,7 @@
                         </a:rPr>
                         <a:t>0.730</a:t>
                       </a:r>
-                      <a:endParaRPr lang="en-US" sz="1250" dirty="0">
+                      <a:endParaRPr lang="en-US" sz="1600" dirty="0">
                         <a:latin typeface="Calibri" charset="0"/>
                         <a:ea typeface="Calibri" charset="0"/>
                         <a:cs typeface="Calibri" charset="0"/>
@@ -8458,7 +8011,7 @@
                         <a:buNone/>
                       </a:pPr>
                       <a:r>
-                        <a:rPr lang="en-US" sz="1250" dirty="0">
+                        <a:rPr lang="en-US" sz="1600" dirty="0">
                           <a:solidFill>
                             <a:srgbClr val="FFFFFF"/>
                           </a:solidFill>
@@ -8468,7 +8021,7 @@
                         </a:rPr>
                         <a:t>34.5 s</a:t>
                       </a:r>
-                      <a:endParaRPr lang="en-US" sz="1250" dirty="0">
+                      <a:endParaRPr lang="en-US" sz="1600" dirty="0">
                         <a:latin typeface="Calibri" charset="0"/>
                         <a:ea typeface="Calibri" charset="0"/>
                         <a:cs typeface="Calibri" charset="0"/>
@@ -8530,8 +8083,8 @@
         </p:nvSpPr>
         <p:spPr>
           <a:xfrm>
-            <a:off x="658368" y="4846320"/>
-            <a:ext cx="5760720" cy="548640"/>
+            <a:off x="658368" y="5266944"/>
+            <a:ext cx="6309360" cy="310896"/>
           </a:xfrm>
           <a:prstGeom prst="rect">
             <a:avLst/>
@@ -8544,13 +8097,10 @@
           <a:lstStyle/>
           <a:p>
             <a:pPr indent="0" marL="0">
-              <a:lnSpc>
-                <a:spcPct val="115000"/>
-              </a:lnSpc>
               <a:buNone/>
             </a:pPr>
             <a:r>
-              <a:rPr lang="en-US" sz="1150" dirty="0">
+              <a:rPr lang="en-US" sz="1300" dirty="0">
                 <a:solidFill>
                   <a:srgbClr val="8E9CB8"/>
                 </a:solidFill>
@@ -8558,9 +8108,9 @@
                 <a:ea typeface="Calibri" pitchFamily="34" charset="-122"/>
                 <a:cs typeface="Calibri" pitchFamily="34" charset="-120"/>
               </a:rPr>
-              <a:t>Budget used: exactly 5,000 unique IDs.  ·  Runtime cap 60 s/seed — worst case 34.5 s.  ·  Guarantee line 0.55 cleared by +0.097.</a:t>
-            </a:r>
-            <a:endParaRPr lang="en-US" sz="1150" dirty="0"/>
+              <a:t>5,000 IDs used  ·  34.5 s worst case, cap 60 s  ·  0.55 line cleared by +0.097</a:t>
+            </a:r>
+            <a:endParaRPr lang="en-US" sz="1300" dirty="0"/>
           </a:p>
         </p:txBody>
       </p:sp>
@@ -8572,12 +8122,12 @@
         </p:nvSpPr>
         <p:spPr>
           <a:xfrm>
-            <a:off x="6949440" y="1517904"/>
-            <a:ext cx="4581144" cy="4443984"/>
+            <a:off x="6949440" y="1371600"/>
+            <a:ext cx="4581144" cy="4572000"/>
           </a:xfrm>
           <a:prstGeom prst="roundRect">
             <a:avLst>
-              <a:gd name="adj" fmla="val 1029"/>
+              <a:gd name="adj" fmla="val 1000"/>
             </a:avLst>
           </a:prstGeom>
           <a:solidFill>
@@ -8594,8 +8144,8 @@
         </p:nvSpPr>
         <p:spPr>
           <a:xfrm>
-            <a:off x="7242048" y="1792224"/>
-            <a:ext cx="3995928" cy="256032"/>
+            <a:off x="7269480" y="1700784"/>
+            <a:ext cx="3977640" cy="292608"/>
           </a:xfrm>
           <a:prstGeom prst="rect">
             <a:avLst/>
@@ -8611,7 +8161,7 @@
               <a:buNone/>
             </a:pPr>
             <a:r>
-              <a:rPr lang="en-US" sz="1100" b="1" spc="110" kern="0" dirty="0">
+              <a:rPr lang="en-US" sz="1300" b="1" spc="110" kern="0" dirty="0">
                 <a:solidFill>
                   <a:srgbClr val="E3A140"/>
                 </a:solidFill>
@@ -8619,9 +8169,9 @@
                 <a:ea typeface="Calibri" pitchFamily="34" charset="-122"/>
                 <a:cs typeface="Calibri" pitchFamily="34" charset="-120"/>
               </a:rPr>
-              <a:t>WHAT WE WOULD TELL THE NEXT TEAM</a:t>
-            </a:r>
-            <a:endParaRPr lang="en-US" sz="1100" dirty="0"/>
+              <a:t>WHAT WE’D TELL THE NEXT TEAM</a:t>
+            </a:r>
+            <a:endParaRPr lang="en-US" sz="1300" dirty="0"/>
           </a:p>
         </p:txBody>
       </p:sp>
@@ -8633,8 +8183,8 @@
         </p:nvSpPr>
         <p:spPr>
           <a:xfrm>
-            <a:off x="7242048" y="2194560"/>
-            <a:ext cx="3995928" cy="1920240"/>
+            <a:off x="7269480" y="2212848"/>
+            <a:ext cx="3977640" cy="786384"/>
           </a:xfrm>
           <a:prstGeom prst="rect">
             <a:avLst/>
@@ -8648,12 +8198,12 @@
           <a:p>
             <a:pPr indent="0" marL="0">
               <a:lnSpc>
-                <a:spcPct val="122000"/>
+                <a:spcPct val="112000"/>
               </a:lnSpc>
               <a:buNone/>
             </a:pPr>
             <a:r>
-              <a:rPr lang="en-US" sz="1300" b="1" dirty="0">
+              <a:rPr lang="en-US" sz="2400" b="1" dirty="0">
                 <a:solidFill>
                   <a:srgbClr val="FFFFFF"/>
                 </a:solidFill>
@@ -8661,26 +8211,29 @@
                 <a:ea typeface="Calibri" pitchFamily="34" charset="-122"/>
                 <a:cs typeface="Calibri" pitchFamily="34" charset="-120"/>
               </a:rPr>
-              <a:t>Read the metric before writing the algorithm. </a:t>
-            </a:r>
+              <a:t>Read the metric before</a:t>
+            </a:r>
+            <a:endParaRPr lang="en-US" sz="2400" dirty="0"/>
+          </a:p>
+          <a:p>
             <a:pPr indent="0" marL="0">
               <a:lnSpc>
-                <a:spcPct val="122000"/>
+                <a:spcPct val="112000"/>
               </a:lnSpc>
               <a:buNone/>
             </a:pPr>
             <a:r>
-              <a:rPr lang="en-US" sz="1300" dirty="0">
-                <a:solidFill>
-                  <a:srgbClr val="C3CEE4"/>
+              <a:rPr lang="en-US" sz="2400" b="1" dirty="0">
+                <a:solidFill>
+                  <a:srgbClr val="FFFFFF"/>
                 </a:solidFill>
                 <a:latin typeface="Calibri" pitchFamily="34" charset="0"/>
                 <a:ea typeface="Calibri" pitchFamily="34" charset="-122"/>
                 <a:cs typeface="Calibri" pitchFamily="34" charset="-120"/>
               </a:rPr>
-              <a:t>“F1 of a minority class at a frozen threshold” quietly rewrites the problem from “label the most informative points” to “find the most positives and train on the right class ratio.” Every gain we made came from that sentence; every idea that ignored it lost.</a:t>
-            </a:r>
-            <a:endParaRPr lang="en-US" sz="1300" dirty="0"/>
+              <a:t>writing the algorithm.</a:t>
+            </a:r>
+            <a:endParaRPr lang="en-US" sz="2400" dirty="0"/>
           </a:p>
         </p:txBody>
       </p:sp>
@@ -8692,8 +8245,8 @@
         </p:nvSpPr>
         <p:spPr>
           <a:xfrm>
-            <a:off x="7242048" y="4279392"/>
-            <a:ext cx="3995928" cy="1463040"/>
+            <a:off x="7269480" y="3072384"/>
+            <a:ext cx="3977640" cy="822960"/>
           </a:xfrm>
           <a:prstGeom prst="rect">
             <a:avLst/>
@@ -8707,39 +8260,149 @@
           <a:p>
             <a:pPr indent="0" marL="0">
               <a:lnSpc>
-                <a:spcPct val="122000"/>
+                <a:spcPct val="118000"/>
               </a:lnSpc>
               <a:buNone/>
             </a:pPr>
             <a:r>
-              <a:rPr lang="en-US" sz="1300" b="1" dirty="0">
-                <a:solidFill>
-                  <a:srgbClr val="FFFFFF"/>
+              <a:rPr lang="en-US" sz="1800" dirty="0">
+                <a:solidFill>
+                  <a:srgbClr val="C3CEE4"/>
                 </a:solidFill>
                 <a:latin typeface="Calibri" pitchFamily="34" charset="0"/>
                 <a:ea typeface="Calibri" pitchFamily="34" charset="-122"/>
                 <a:cs typeface="Calibri" pitchFamily="34" charset="-120"/>
               </a:rPr>
-              <a:t>Measure your noise floor first. </a:t>
-            </a:r>
+              <a:t>It rewrote the problem from “label the most informative points” to “find the most positives”.</a:t>
+            </a:r>
+            <a:endParaRPr lang="en-US" sz="1800" dirty="0"/>
+          </a:p>
+        </p:txBody>
+      </p:sp>
+      <p:sp>
+        <p:nvSpPr>
+          <p:cNvPr id="14" name="Shape 11"/>
+          <p:cNvSpPr/>
+          <p:nvPr/>
+        </p:nvSpPr>
+        <p:spPr>
+          <a:xfrm>
+            <a:off x="7269480" y="4114800"/>
+            <a:ext cx="3977640" cy="0"/>
+          </a:xfrm>
+          <a:prstGeom prst="line">
+            <a:avLst/>
+          </a:prstGeom>
+          <a:noFill/>
+          <a:ln w="12700">
+            <a:solidFill>
+              <a:srgbClr val="2C3A5C"/>
+            </a:solidFill>
+            <a:prstDash val="solid"/>
+          </a:ln>
+        </p:spPr>
+      </p:sp>
+      <p:sp>
+        <p:nvSpPr>
+          <p:cNvPr id="15" name="Text 12"/>
+          <p:cNvSpPr/>
+          <p:nvPr/>
+        </p:nvSpPr>
+        <p:spPr>
+          <a:xfrm>
+            <a:off x="7269480" y="4315968"/>
+            <a:ext cx="3977640" cy="786384"/>
+          </a:xfrm>
+          <a:prstGeom prst="rect">
+            <a:avLst/>
+          </a:prstGeom>
+          <a:noFill/>
+          <a:ln/>
+        </p:spPr>
+        <p:txBody>
+          <a:bodyPr wrap="square" lIns="0" tIns="0" rIns="0" bIns="0" rtlCol="0" anchor="ctr"/>
+          <a:lstStyle/>
+          <a:p>
             <a:pPr indent="0" marL="0">
               <a:lnSpc>
-                <a:spcPct val="122000"/>
+                <a:spcPct val="112000"/>
               </a:lnSpc>
               <a:buNone/>
             </a:pPr>
             <a:r>
-              <a:rPr lang="en-US" sz="1300" dirty="0">
-                <a:solidFill>
-                  <a:srgbClr val="C3CEE4"/>
+              <a:rPr lang="en-US" sz="2400" b="1" dirty="0">
+                <a:solidFill>
+                  <a:srgbClr val="FFFFFF"/>
                 </a:solidFill>
                 <a:latin typeface="Calibri" pitchFamily="34" charset="0"/>
                 <a:ea typeface="Calibri" pitchFamily="34" charset="-122"/>
                 <a:cs typeface="Calibri" pitchFamily="34" charset="-120"/>
               </a:rPr>
-              <a:t>Ours was ±0.005 — from training row order alone. Without it we would have “improved” the model nine times and shipped nothing but overfitting.</a:t>
-            </a:r>
-            <a:endParaRPr lang="en-US" sz="1300" dirty="0"/>
+              <a:t>Measure your noise floor</a:t>
+            </a:r>
+            <a:endParaRPr lang="en-US" sz="2400" dirty="0"/>
+          </a:p>
+          <a:p>
+            <a:pPr indent="0" marL="0">
+              <a:lnSpc>
+                <a:spcPct val="112000"/>
+              </a:lnSpc>
+              <a:buNone/>
+            </a:pPr>
+            <a:r>
+              <a:rPr lang="en-US" sz="2400" b="1" dirty="0">
+                <a:solidFill>
+                  <a:srgbClr val="FFFFFF"/>
+                </a:solidFill>
+                <a:latin typeface="Calibri" pitchFamily="34" charset="0"/>
+                <a:ea typeface="Calibri" pitchFamily="34" charset="-122"/>
+                <a:cs typeface="Calibri" pitchFamily="34" charset="-120"/>
+              </a:rPr>
+              <a:t>first.</a:t>
+            </a:r>
+            <a:endParaRPr lang="en-US" sz="2400" dirty="0"/>
+          </a:p>
+        </p:txBody>
+      </p:sp>
+      <p:sp>
+        <p:nvSpPr>
+          <p:cNvPr id="16" name="Text 13"/>
+          <p:cNvSpPr/>
+          <p:nvPr/>
+        </p:nvSpPr>
+        <p:spPr>
+          <a:xfrm>
+            <a:off x="7269480" y="5175504"/>
+            <a:ext cx="3977640" cy="640080"/>
+          </a:xfrm>
+          <a:prstGeom prst="rect">
+            <a:avLst/>
+          </a:prstGeom>
+          <a:noFill/>
+          <a:ln/>
+        </p:spPr>
+        <p:txBody>
+          <a:bodyPr wrap="square" lIns="0" tIns="0" rIns="0" bIns="0" rtlCol="0" anchor="ctr"/>
+          <a:lstStyle/>
+          <a:p>
+            <a:pPr indent="0" marL="0">
+              <a:lnSpc>
+                <a:spcPct val="118000"/>
+              </a:lnSpc>
+              <a:buNone/>
+            </a:pPr>
+            <a:r>
+              <a:rPr lang="en-US" sz="1800" dirty="0">
+                <a:solidFill>
+                  <a:srgbClr val="C3CEE4"/>
+                </a:solidFill>
+                <a:latin typeface="Calibri" pitchFamily="34" charset="0"/>
+                <a:ea typeface="Calibri" pitchFamily="34" charset="-122"/>
+                <a:cs typeface="Calibri" pitchFamily="34" charset="-120"/>
+              </a:rPr>
+              <a:t>Ours was ±0.005. Without it we’d have “improved” the model nine times.</a:t>
+            </a:r>
+            <a:endParaRPr lang="en-US" sz="1800" dirty="0"/>
           </a:p>
         </p:txBody>
       </p:sp>
